--- a/training/slides/Module_03_Full_Factorial.pptx
+++ b/training/slides/Module_03_Full_Factorial.pptx
@@ -15,7 +15,6 @@
     <p:sldId id="263" r:id="rId14"/>
     <p:sldId id="264" r:id="rId15"/>
     <p:sldId id="265" r:id="rId16"/>
-    <p:sldId id="266" r:id="rId17"/>
   </p:sldIdLst>
   <p:sldSz cx="12191695" cy="6858000" type="screen4x3"/>
   <p:notesSz cx="6858000" cy="9144000"/>
@@ -3094,7 +3093,7 @@
     <p:bg>
       <p:bgPr>
         <a:solidFill>
-          <a:srgbClr val="1A1A2E"/>
+          <a:srgbClr val="1E1B4B"/>
         </a:solidFill>
         <a:effectLst/>
       </p:bgPr>
@@ -3115,13 +3114,13 @@
         <p:spPr>
           <a:xfrm>
             <a:off x="0" y="0"/>
-            <a:ext cx="137160" cy="6858000"/>
+            <a:ext cx="5943600" cy="6858000"/>
           </a:xfrm>
           <a:prstGeom prst="rect">
             <a:avLst/>
           </a:prstGeom>
           <a:solidFill>
-            <a:srgbClr val="007BFF"/>
+            <a:srgbClr val="1E1B4B"/>
           </a:solidFill>
           <a:ln>
             <a:noFill/>
@@ -3151,50 +3150,288 @@
       </p:sp>
       <p:sp>
         <p:nvSpPr>
-          <p:cNvPr id="3" name="TextBox 2"/>
+          <p:cNvPr id="3" name="Rectangle 2"/>
+          <p:cNvSpPr/>
+          <p:nvPr/>
+        </p:nvSpPr>
+        <p:spPr>
+          <a:xfrm>
+            <a:off x="5943600" y="0"/>
+            <a:ext cx="3200400" cy="6858000"/>
+          </a:xfrm>
+          <a:prstGeom prst="rect">
+            <a:avLst/>
+          </a:prstGeom>
+          <a:solidFill>
+            <a:srgbClr val="312E81"/>
+          </a:solidFill>
+          <a:ln>
+            <a:noFill/>
+          </a:ln>
+        </p:spPr>
+        <p:style>
+          <a:lnRef idx="1">
+            <a:schemeClr val="accent1"/>
+          </a:lnRef>
+          <a:fillRef idx="3">
+            <a:schemeClr val="accent1"/>
+          </a:fillRef>
+          <a:effectRef idx="2">
+            <a:schemeClr val="accent1"/>
+          </a:effectRef>
+          <a:fontRef idx="minor">
+            <a:schemeClr val="lt1"/>
+          </a:fontRef>
+        </p:style>
+        <p:txBody>
+          <a:bodyPr rtlCol="0" anchor="ctr"/>
+          <a:lstStyle/>
+          <a:p>
+            <a:pPr algn="ctr"/>
+          </a:p>
+        </p:txBody>
+      </p:sp>
+      <p:sp>
+        <p:nvSpPr>
+          <p:cNvPr id="4" name="Rectangle 3"/>
+          <p:cNvSpPr/>
+          <p:nvPr/>
+        </p:nvSpPr>
+        <p:spPr>
+          <a:xfrm>
+            <a:off x="9144000" y="0"/>
+            <a:ext cx="3047695" cy="6858000"/>
+          </a:xfrm>
+          <a:prstGeom prst="rect">
+            <a:avLst/>
+          </a:prstGeom>
+          <a:solidFill>
+            <a:srgbClr val="4338CA"/>
+          </a:solidFill>
+          <a:ln>
+            <a:noFill/>
+          </a:ln>
+        </p:spPr>
+        <p:style>
+          <a:lnRef idx="1">
+            <a:schemeClr val="accent1"/>
+          </a:lnRef>
+          <a:fillRef idx="3">
+            <a:schemeClr val="accent1"/>
+          </a:fillRef>
+          <a:effectRef idx="2">
+            <a:schemeClr val="accent1"/>
+          </a:effectRef>
+          <a:fontRef idx="minor">
+            <a:schemeClr val="lt1"/>
+          </a:fontRef>
+        </p:style>
+        <p:txBody>
+          <a:bodyPr rtlCol="0" anchor="ctr"/>
+          <a:lstStyle/>
+          <a:p>
+            <a:pPr algn="ctr"/>
+          </a:p>
+        </p:txBody>
+      </p:sp>
+      <p:sp>
+        <p:nvSpPr>
+          <p:cNvPr id="5" name="Rectangle 4"/>
+          <p:cNvSpPr/>
+          <p:nvPr/>
+        </p:nvSpPr>
+        <p:spPr>
+          <a:xfrm>
+            <a:off x="0" y="0"/>
+            <a:ext cx="73152" cy="6858000"/>
+          </a:xfrm>
+          <a:prstGeom prst="rect">
+            <a:avLst/>
+          </a:prstGeom>
+          <a:solidFill>
+            <a:srgbClr val="6366F1"/>
+          </a:solidFill>
+          <a:ln>
+            <a:noFill/>
+          </a:ln>
+        </p:spPr>
+        <p:style>
+          <a:lnRef idx="1">
+            <a:schemeClr val="accent1"/>
+          </a:lnRef>
+          <a:fillRef idx="3">
+            <a:schemeClr val="accent1"/>
+          </a:fillRef>
+          <a:effectRef idx="2">
+            <a:schemeClr val="accent1"/>
+          </a:effectRef>
+          <a:fontRef idx="minor">
+            <a:schemeClr val="lt1"/>
+          </a:fontRef>
+        </p:style>
+        <p:txBody>
+          <a:bodyPr rtlCol="0" anchor="ctr"/>
+          <a:lstStyle/>
+          <a:p>
+            <a:pPr algn="ctr"/>
+          </a:p>
+        </p:txBody>
+      </p:sp>
+      <p:sp>
+        <p:nvSpPr>
+          <p:cNvPr id="6" name="Oval 5"/>
+          <p:cNvSpPr/>
+          <p:nvPr/>
+        </p:nvSpPr>
+        <p:spPr>
+          <a:xfrm>
+            <a:off x="8229600" y="-914400"/>
+            <a:ext cx="4572000" cy="4572000"/>
+          </a:xfrm>
+          <a:prstGeom prst="ellipse">
+            <a:avLst/>
+          </a:prstGeom>
+          <a:solidFill>
+            <a:srgbClr val="6366F1">
+              <a:lumMod val="70000"/>
+              <a:lumOff val="30000"/>
+            </a:srgbClr>
+          </a:solidFill>
+          <a:ln>
+            <a:noFill/>
+          </a:ln>
+        </p:spPr>
+        <p:style>
+          <a:lnRef idx="1">
+            <a:schemeClr val="accent1"/>
+          </a:lnRef>
+          <a:fillRef idx="3">
+            <a:schemeClr val="accent1"/>
+          </a:fillRef>
+          <a:effectRef idx="2">
+            <a:schemeClr val="accent1"/>
+          </a:effectRef>
+          <a:fontRef idx="minor">
+            <a:schemeClr val="lt1"/>
+          </a:fontRef>
+        </p:style>
+        <p:txBody>
+          <a:bodyPr rtlCol="0" anchor="ctr"/>
+          <a:lstStyle/>
+          <a:p>
+            <a:pPr algn="ctr"/>
+          </a:p>
+        </p:txBody>
+      </p:sp>
+      <p:sp>
+        <p:nvSpPr>
+          <p:cNvPr id="7" name="Oval 6"/>
+          <p:cNvSpPr/>
+          <p:nvPr/>
+        </p:nvSpPr>
+        <p:spPr>
+          <a:xfrm>
+            <a:off x="-914400" y="3657600"/>
+            <a:ext cx="3657600" cy="3657600"/>
+          </a:xfrm>
+          <a:prstGeom prst="ellipse">
+            <a:avLst/>
+          </a:prstGeom>
+          <a:solidFill>
+            <a:srgbClr val="5046E5">
+              <a:lumMod val="60000"/>
+              <a:lumOff val="40000"/>
+            </a:srgbClr>
+          </a:solidFill>
+          <a:ln>
+            <a:noFill/>
+          </a:ln>
+        </p:spPr>
+        <p:style>
+          <a:lnRef idx="1">
+            <a:schemeClr val="accent1"/>
+          </a:lnRef>
+          <a:fillRef idx="3">
+            <a:schemeClr val="accent1"/>
+          </a:fillRef>
+          <a:effectRef idx="2">
+            <a:schemeClr val="accent1"/>
+          </a:effectRef>
+          <a:fontRef idx="minor">
+            <a:schemeClr val="lt1"/>
+          </a:fontRef>
+        </p:style>
+        <p:txBody>
+          <a:bodyPr rtlCol="0" anchor="ctr"/>
+          <a:lstStyle/>
+          <a:p>
+            <a:pPr algn="ctr"/>
+          </a:p>
+        </p:txBody>
+      </p:sp>
+      <p:sp>
+        <p:nvSpPr>
+          <p:cNvPr id="8" name="Rounded Rectangle 7"/>
+          <p:cNvSpPr/>
+          <p:nvPr/>
+        </p:nvSpPr>
+        <p:spPr>
+          <a:xfrm>
+            <a:off x="914400" y="1371600"/>
+            <a:ext cx="2377440" cy="438912"/>
+          </a:xfrm>
+          <a:prstGeom prst="roundRect">
+            <a:avLst/>
+          </a:prstGeom>
+          <a:solidFill>
+            <a:srgbClr val="312E81"/>
+          </a:solidFill>
+          <a:ln>
+            <a:noFill/>
+          </a:ln>
+        </p:spPr>
+        <p:style>
+          <a:lnRef idx="1">
+            <a:schemeClr val="accent1"/>
+          </a:lnRef>
+          <a:fillRef idx="3">
+            <a:schemeClr val="accent1"/>
+          </a:fillRef>
+          <a:effectRef idx="2">
+            <a:schemeClr val="accent1"/>
+          </a:effectRef>
+          <a:fontRef idx="minor">
+            <a:schemeClr val="lt1"/>
+          </a:fontRef>
+        </p:style>
+        <p:txBody>
+          <a:bodyPr rtlCol="0" anchor="ctr" lIns="137160"/>
+          <a:lstStyle/>
+          <a:p>
+            <a:pPr algn="l">
+              <a:defRPr sz="1400" b="1">
+                <a:solidFill>
+                  <a:srgbClr val="C7D2FE"/>
+                </a:solidFill>
+                <a:latin typeface="Consolas"/>
+              </a:defRPr>
+            </a:pPr>
+            <a:r>
+              <a:t>MODULE 3</a:t>
+            </a:r>
+          </a:p>
+        </p:txBody>
+      </p:sp>
+      <p:sp>
+        <p:nvSpPr>
+          <p:cNvPr id="9" name="TextBox 8"/>
           <p:cNvSpPr txBox="1"/>
           <p:nvPr/>
         </p:nvSpPr>
         <p:spPr>
           <a:xfrm>
-            <a:off x="914400" y="1097280"/>
-            <a:ext cx="10058400" cy="731520"/>
-          </a:xfrm>
-          <a:prstGeom prst="rect">
-            <a:avLst/>
-          </a:prstGeom>
-          <a:noFill/>
-        </p:spPr>
-        <p:txBody>
-          <a:bodyPr wrap="none">
-            <a:spAutoFit/>
-          </a:bodyPr>
-          <a:lstStyle/>
-          <a:p>
-            <a:pPr>
-              <a:defRPr sz="2000" b="1">
-                <a:solidFill>
-                  <a:srgbClr val="007BFF"/>
-                </a:solidFill>
-                <a:latin typeface="Calibri"/>
-              </a:defRPr>
-            </a:pPr>
-            <a:r>
-              <a:t>MODULE 3</a:t>
-            </a:r>
-          </a:p>
-        </p:txBody>
-      </p:sp>
-      <p:sp>
-        <p:nvSpPr>
-          <p:cNvPr id="4" name="TextBox 3"/>
-          <p:cNvSpPr txBox="1"/>
-          <p:nvPr/>
-        </p:nvSpPr>
-        <p:spPr>
-          <a:xfrm>
-            <a:off x="914400" y="2011680"/>
-            <a:ext cx="10058400" cy="1828800"/>
+            <a:off x="914400" y="2286000"/>
+            <a:ext cx="9144000" cy="2011680"/>
           </a:xfrm>
           <a:prstGeom prst="rect">
             <a:avLst/>
@@ -3207,12 +3444,12 @@
           </a:bodyPr>
           <a:lstStyle/>
           <a:p>
-            <a:pPr>
-              <a:defRPr sz="4400" b="1">
+            <a:pPr algn="l">
+              <a:defRPr sz="4000" b="1">
                 <a:solidFill>
                   <a:srgbClr val="FFFFFF"/>
                 </a:solidFill>
-                <a:latin typeface="Calibri"/>
+                <a:latin typeface="Inter"/>
               </a:defRPr>
             </a:pPr>
             <a:r>
@@ -3223,14 +3460,14 @@
       </p:sp>
       <p:sp>
         <p:nvSpPr>
-          <p:cNvPr id="5" name="TextBox 4"/>
+          <p:cNvPr id="10" name="TextBox 9"/>
           <p:cNvSpPr txBox="1"/>
           <p:nvPr/>
         </p:nvSpPr>
         <p:spPr>
           <a:xfrm>
-            <a:off x="914400" y="4114800"/>
-            <a:ext cx="9144000" cy="1371600"/>
+            <a:off x="914400" y="4389120"/>
+            <a:ext cx="8686800" cy="1371600"/>
           </a:xfrm>
           <a:prstGeom prst="rect">
             <a:avLst/>
@@ -3243,12 +3480,12 @@
           </a:bodyPr>
           <a:lstStyle/>
           <a:p>
-            <a:pPr>
-              <a:defRPr sz="2200">
-                <a:solidFill>
-                  <a:srgbClr val="CCCCCC"/>
-                </a:solidFill>
-                <a:latin typeface="Calibri"/>
+            <a:pPr algn="l">
+              <a:defRPr sz="1900" b="0">
+                <a:solidFill>
+                  <a:srgbClr val="A5B4FC"/>
+                </a:solidFill>
+                <a:latin typeface="Inter"/>
               </a:defRPr>
             </a:pPr>
             <a:r>
@@ -3259,14 +3496,14 @@
       </p:sp>
       <p:sp>
         <p:nvSpPr>
-          <p:cNvPr id="6" name="TextBox 5"/>
+          <p:cNvPr id="11" name="TextBox 10"/>
           <p:cNvSpPr txBox="1"/>
           <p:nvPr/>
         </p:nvSpPr>
         <p:spPr>
           <a:xfrm>
-            <a:off x="914400" y="6126480"/>
-            <a:ext cx="10058400" cy="457200"/>
+            <a:off x="731520" y="6400800"/>
+            <a:ext cx="10058400" cy="365760"/>
           </a:xfrm>
           <a:prstGeom prst="rect">
             <a:avLst/>
@@ -3279,16 +3516,16 @@
           </a:bodyPr>
           <a:lstStyle/>
           <a:p>
-            <a:pPr>
-              <a:defRPr sz="1200">
-                <a:solidFill>
-                  <a:srgbClr val="888888"/>
-                </a:solidFill>
-                <a:latin typeface="Calibri"/>
-              </a:defRPr>
-            </a:pPr>
-            <a:r>
-              <a:t>Copyright © 2026 Martin J. Gallagher. Licensed under GPL-3.0-or-later.</a:t>
+            <a:pPr algn="l">
+              <a:defRPr sz="1000" b="0">
+                <a:solidFill>
+                  <a:srgbClr val="6366F1"/>
+                </a:solidFill>
+                <a:latin typeface="Consolas"/>
+              </a:defRPr>
+            </a:pPr>
+            <a:r>
+              <a:t>© 2026 Martin J. Gallagher  |  GPL-3.0-or-later  |  doehelper.com</a:t>
             </a:r>
           </a:p>
         </p:txBody>
@@ -3307,7 +3544,7 @@
     <p:bg>
       <p:bgPr>
         <a:solidFill>
-          <a:srgbClr val="1A1A2E"/>
+          <a:srgbClr val="FAFAFA"/>
         </a:solidFill>
         <a:effectLst/>
       </p:bgPr>
@@ -3321,56 +3558,20 @@
       <p:grpSpPr/>
       <p:sp>
         <p:nvSpPr>
-          <p:cNvPr id="2" name="TextBox 1"/>
-          <p:cNvSpPr txBox="1"/>
-          <p:nvPr/>
-        </p:nvSpPr>
-        <p:spPr>
-          <a:xfrm>
-            <a:off x="731520" y="457200"/>
-            <a:ext cx="10515600" cy="914400"/>
-          </a:xfrm>
-          <a:prstGeom prst="rect">
-            <a:avLst/>
-          </a:prstGeom>
-          <a:noFill/>
-        </p:spPr>
-        <p:txBody>
-          <a:bodyPr wrap="none">
-            <a:spAutoFit/>
-          </a:bodyPr>
-          <a:lstStyle/>
-          <a:p>
-            <a:pPr>
-              <a:defRPr sz="3400" b="1">
-                <a:solidFill>
-                  <a:srgbClr val="FFFFFF"/>
-                </a:solidFill>
-                <a:latin typeface="Calibri"/>
-              </a:defRPr>
-            </a:pPr>
-            <a:r>
-              <a:t>Key Takeaways</a:t>
-            </a:r>
-          </a:p>
-        </p:txBody>
-      </p:sp>
-      <p:sp>
-        <p:nvSpPr>
-          <p:cNvPr id="3" name="Rounded Rectangle 2"/>
+          <p:cNvPr id="2" name="Rectangle 1"/>
           <p:cNvSpPr/>
           <p:nvPr/>
         </p:nvSpPr>
         <p:spPr>
           <a:xfrm>
-            <a:off x="731520" y="1645920"/>
-            <a:ext cx="10515600" cy="822960"/>
-          </a:xfrm>
-          <a:prstGeom prst="roundRect">
+            <a:off x="0" y="0"/>
+            <a:ext cx="12191695" cy="45720"/>
+          </a:xfrm>
+          <a:prstGeom prst="rect">
             <a:avLst/>
           </a:prstGeom>
           <a:solidFill>
-            <a:srgbClr val="2A2A4A"/>
+            <a:srgbClr val="D97706"/>
           </a:solidFill>
           <a:ln>
             <a:noFill/>
@@ -3391,39 +3592,29 @@
           </a:fontRef>
         </p:style>
         <p:txBody>
-          <a:bodyPr rtlCol="0" anchor="ctr" lIns="274320"/>
-          <a:lstStyle/>
-          <a:p>
-            <a:pPr algn="ctr">
-              <a:defRPr sz="2200">
-                <a:solidFill>
-                  <a:srgbClr val="FFFFFF"/>
-                </a:solidFill>
-                <a:latin typeface="Calibri"/>
-              </a:defRPr>
-            </a:pPr>
-            <a:r>
-              <a:t>Full factorial = every combination, captures all effects</a:t>
-            </a:r>
-          </a:p>
-        </p:txBody>
-      </p:sp>
-      <p:sp>
-        <p:nvSpPr>
-          <p:cNvPr id="4" name="Rounded Rectangle 3"/>
+          <a:bodyPr rtlCol="0" anchor="ctr"/>
+          <a:lstStyle/>
+          <a:p>
+            <a:pPr algn="ctr"/>
+          </a:p>
+        </p:txBody>
+      </p:sp>
+      <p:sp>
+        <p:nvSpPr>
+          <p:cNvPr id="3" name="Rounded Rectangle 2"/>
           <p:cNvSpPr/>
           <p:nvPr/>
         </p:nvSpPr>
         <p:spPr>
           <a:xfrm>
-            <a:off x="731520" y="2606040"/>
-            <a:ext cx="10515600" cy="822960"/>
+            <a:off x="548640" y="274320"/>
+            <a:ext cx="2194560" cy="457200"/>
           </a:xfrm>
           <a:prstGeom prst="roundRect">
             <a:avLst/>
           </a:prstGeom>
           <a:solidFill>
-            <a:srgbClr val="2A2A4A"/>
+            <a:srgbClr val="D97706"/>
           </a:solidFill>
           <a:ln>
             <a:noFill/>
@@ -3444,19 +3635,55 @@
           </a:fontRef>
         </p:style>
         <p:txBody>
-          <a:bodyPr rtlCol="0" anchor="ctr" lIns="274320"/>
+          <a:bodyPr rtlCol="0" anchor="ctr"/>
           <a:lstStyle/>
           <a:p>
             <a:pPr algn="ctr">
-              <a:defRPr sz="2200">
+              <a:defRPr sz="1300" b="1">
                 <a:solidFill>
                   <a:srgbClr val="FFFFFF"/>
                 </a:solidFill>
-                <a:latin typeface="Calibri"/>
-              </a:defRPr>
-            </a:pPr>
-            <a:r>
-              <a:t>2^k runs: practical for up to ~5-6 factors</a:t>
+                <a:latin typeface="Consolas"/>
+              </a:defRPr>
+            </a:pPr>
+            <a:r>
+              <a:t>HANDS-ON EXERCISE</a:t>
+            </a:r>
+          </a:p>
+        </p:txBody>
+      </p:sp>
+      <p:sp>
+        <p:nvSpPr>
+          <p:cNvPr id="4" name="TextBox 3"/>
+          <p:cNvSpPr txBox="1"/>
+          <p:nvPr/>
+        </p:nvSpPr>
+        <p:spPr>
+          <a:xfrm>
+            <a:off x="3017520" y="274320"/>
+            <a:ext cx="8229600" cy="548640"/>
+          </a:xfrm>
+          <a:prstGeom prst="rect">
+            <a:avLst/>
+          </a:prstGeom>
+          <a:noFill/>
+        </p:spPr>
+        <p:txBody>
+          <a:bodyPr wrap="square">
+            <a:spAutoFit/>
+          </a:bodyPr>
+          <a:lstStyle/>
+          <a:p>
+            <a:pPr algn="l">
+              <a:defRPr sz="2600" b="1">
+                <a:solidFill>
+                  <a:srgbClr val="111111"/>
+                </a:solidFill>
+                <a:latin typeface="Inter"/>
+              </a:defRPr>
+            </a:pPr>
+            <a:r>
+              <a:t>Exercise 3: Seal Strength Experiment</a:t>
             </a:r>
           </a:p>
         </p:txBody>
@@ -3469,14 +3696,14 @@
         </p:nvSpPr>
         <p:spPr>
           <a:xfrm>
-            <a:off x="731520" y="3566160"/>
-            <a:ext cx="10515600" cy="822960"/>
+            <a:off x="548640" y="1005840"/>
+            <a:ext cx="10972800" cy="5120640"/>
           </a:xfrm>
           <a:prstGeom prst="roundRect">
             <a:avLst/>
           </a:prstGeom>
           <a:solidFill>
-            <a:srgbClr val="2A2A4A"/>
+            <a:srgbClr val="FFFBEB"/>
           </a:solidFill>
           <a:ln>
             <a:noFill/>
@@ -3497,39 +3724,29 @@
           </a:fontRef>
         </p:style>
         <p:txBody>
-          <a:bodyPr rtlCol="0" anchor="ctr" lIns="274320"/>
-          <a:lstStyle/>
-          <a:p>
-            <a:pPr algn="ctr">
-              <a:defRPr sz="2200">
-                <a:solidFill>
-                  <a:srgbClr val="FFFFFF"/>
-                </a:solidFill>
-                <a:latin typeface="Calibri"/>
-              </a:defRPr>
-            </a:pPr>
-            <a:r>
-              <a:t>Interactions are why DOE beats OVAT</a:t>
-            </a:r>
-          </a:p>
-        </p:txBody>
-      </p:sp>
-      <p:sp>
-        <p:nvSpPr>
-          <p:cNvPr id="6" name="Rounded Rectangle 5"/>
+          <a:bodyPr rtlCol="0" anchor="ctr"/>
+          <a:lstStyle/>
+          <a:p>
+            <a:pPr algn="ctr"/>
+          </a:p>
+        </p:txBody>
+      </p:sp>
+      <p:sp>
+        <p:nvSpPr>
+          <p:cNvPr id="6" name="Rectangle 5"/>
           <p:cNvSpPr/>
           <p:nvPr/>
         </p:nvSpPr>
         <p:spPr>
           <a:xfrm>
-            <a:off x="731520" y="4526280"/>
-            <a:ext cx="10515600" cy="822960"/>
-          </a:xfrm>
-          <a:prstGeom prst="roundRect">
+            <a:off x="548640" y="1005840"/>
+            <a:ext cx="36576" cy="5120640"/>
+          </a:xfrm>
+          <a:prstGeom prst="rect">
             <a:avLst/>
           </a:prstGeom>
           <a:solidFill>
-            <a:srgbClr val="2A2A4A"/>
+            <a:srgbClr val="D97706"/>
           </a:solidFill>
           <a:ln>
             <a:noFill/>
@@ -3550,138 +3767,6 @@
           </a:fontRef>
         </p:style>
         <p:txBody>
-          <a:bodyPr rtlCol="0" anchor="ctr" lIns="274320"/>
-          <a:lstStyle/>
-          <a:p>
-            <a:pPr algn="ctr">
-              <a:defRPr sz="2200">
-                <a:solidFill>
-                  <a:srgbClr val="FFFFFF"/>
-                </a:solidFill>
-                <a:latin typeface="Calibri"/>
-              </a:defRPr>
-            </a:pPr>
-            <a:r>
-              <a:t>Center points detect curvature cheaply</a:t>
-            </a:r>
-          </a:p>
-        </p:txBody>
-      </p:sp>
-      <p:sp>
-        <p:nvSpPr>
-          <p:cNvPr id="7" name="Rounded Rectangle 6"/>
-          <p:cNvSpPr/>
-          <p:nvPr/>
-        </p:nvSpPr>
-        <p:spPr>
-          <a:xfrm>
-            <a:off x="731520" y="5486400"/>
-            <a:ext cx="10515600" cy="822960"/>
-          </a:xfrm>
-          <a:prstGeom prst="roundRect">
-            <a:avLst/>
-          </a:prstGeom>
-          <a:solidFill>
-            <a:srgbClr val="2A2A4A"/>
-          </a:solidFill>
-          <a:ln>
-            <a:noFill/>
-          </a:ln>
-        </p:spPr>
-        <p:style>
-          <a:lnRef idx="1">
-            <a:schemeClr val="accent1"/>
-          </a:lnRef>
-          <a:fillRef idx="3">
-            <a:schemeClr val="accent1"/>
-          </a:fillRef>
-          <a:effectRef idx="2">
-            <a:schemeClr val="accent1"/>
-          </a:effectRef>
-          <a:fontRef idx="minor">
-            <a:schemeClr val="lt1"/>
-          </a:fontRef>
-        </p:style>
-        <p:txBody>
-          <a:bodyPr rtlCol="0" anchor="ctr" lIns="274320"/>
-          <a:lstStyle/>
-          <a:p>
-            <a:pPr algn="ctr">
-              <a:defRPr sz="2200">
-                <a:solidFill>
-                  <a:srgbClr val="FFFFFF"/>
-                </a:solidFill>
-                <a:latin typeface="Calibri"/>
-              </a:defRPr>
-            </a:pPr>
-            <a:r>
-              <a:t>doe-helper automates generation, recording, and analysis</a:t>
-            </a:r>
-          </a:p>
-        </p:txBody>
-      </p:sp>
-    </p:spTree>
-  </p:cSld>
-  <p:clrMapOvr>
-    <a:masterClrMapping/>
-  </p:clrMapOvr>
-</p:sld>
-</file>
-
-<file path=ppt/slides/slide11.xml><?xml version="1.0" encoding="utf-8"?>
-<p:sld xmlns:a="http://schemas.openxmlformats.org/drawingml/2006/main" xmlns:p="http://schemas.openxmlformats.org/presentationml/2006/main" xmlns:r="http://schemas.openxmlformats.org/officeDocument/2006/relationships">
-  <p:cSld>
-    <p:bg>
-      <p:bgPr>
-        <a:solidFill>
-          <a:srgbClr val="FFFFFF"/>
-        </a:solidFill>
-        <a:effectLst/>
-      </p:bgPr>
-    </p:bg>
-    <p:spTree>
-      <p:nvGrpSpPr>
-        <p:cNvPr id="1" name=""/>
-        <p:cNvGrpSpPr/>
-        <p:nvPr/>
-      </p:nvGrpSpPr>
-      <p:grpSpPr/>
-      <p:sp>
-        <p:nvSpPr>
-          <p:cNvPr id="2" name="Rectangle 1"/>
-          <p:cNvSpPr/>
-          <p:nvPr/>
-        </p:nvSpPr>
-        <p:spPr>
-          <a:xfrm>
-            <a:off x="0" y="0"/>
-            <a:ext cx="12191695" cy="54864"/>
-          </a:xfrm>
-          <a:prstGeom prst="rect">
-            <a:avLst/>
-          </a:prstGeom>
-          <a:solidFill>
-            <a:srgbClr val="FF8C00"/>
-          </a:solidFill>
-          <a:ln>
-            <a:noFill/>
-          </a:ln>
-        </p:spPr>
-        <p:style>
-          <a:lnRef idx="1">
-            <a:schemeClr val="accent1"/>
-          </a:lnRef>
-          <a:fillRef idx="3">
-            <a:schemeClr val="accent1"/>
-          </a:fillRef>
-          <a:effectRef idx="2">
-            <a:schemeClr val="accent1"/>
-          </a:effectRef>
-          <a:fontRef idx="minor">
-            <a:schemeClr val="lt1"/>
-          </a:fontRef>
-        </p:style>
-        <p:txBody>
           <a:bodyPr rtlCol="0" anchor="ctr"/>
           <a:lstStyle/>
           <a:p>
@@ -3691,103 +3776,14 @@
       </p:sp>
       <p:sp>
         <p:nvSpPr>
-          <p:cNvPr id="3" name="Rounded Rectangle 2"/>
-          <p:cNvSpPr/>
-          <p:nvPr/>
-        </p:nvSpPr>
-        <p:spPr>
-          <a:xfrm>
-            <a:off x="731520" y="320040"/>
-            <a:ext cx="2011680" cy="502920"/>
-          </a:xfrm>
-          <a:prstGeom prst="roundRect">
-            <a:avLst/>
-          </a:prstGeom>
-          <a:solidFill>
-            <a:srgbClr val="FF8C00"/>
-          </a:solidFill>
-          <a:ln>
-            <a:noFill/>
-          </a:ln>
-        </p:spPr>
-        <p:style>
-          <a:lnRef idx="1">
-            <a:schemeClr val="accent1"/>
-          </a:lnRef>
-          <a:fillRef idx="3">
-            <a:schemeClr val="accent1"/>
-          </a:fillRef>
-          <a:effectRef idx="2">
-            <a:schemeClr val="accent1"/>
-          </a:effectRef>
-          <a:fontRef idx="minor">
-            <a:schemeClr val="lt1"/>
-          </a:fontRef>
-        </p:style>
-        <p:txBody>
-          <a:bodyPr rtlCol="0" anchor="ctr"/>
-          <a:lstStyle/>
-          <a:p>
-            <a:pPr algn="ctr">
-              <a:defRPr sz="1400" b="1">
-                <a:solidFill>
-                  <a:srgbClr val="FFFFFF"/>
-                </a:solidFill>
-                <a:latin typeface="Calibri"/>
-              </a:defRPr>
-            </a:pPr>
-            <a:r>
-              <a:t>HANDS-ON EXERCISE</a:t>
-            </a:r>
-          </a:p>
-        </p:txBody>
-      </p:sp>
-      <p:sp>
-        <p:nvSpPr>
-          <p:cNvPr id="4" name="TextBox 3"/>
+          <p:cNvPr id="7" name="TextBox 6"/>
           <p:cNvSpPr txBox="1"/>
           <p:nvPr/>
         </p:nvSpPr>
         <p:spPr>
           <a:xfrm>
-            <a:off x="3017520" y="320040"/>
-            <a:ext cx="8229600" cy="731520"/>
-          </a:xfrm>
-          <a:prstGeom prst="rect">
-            <a:avLst/>
-          </a:prstGeom>
-          <a:noFill/>
-        </p:spPr>
-        <p:txBody>
-          <a:bodyPr wrap="none">
-            <a:spAutoFit/>
-          </a:bodyPr>
-          <a:lstStyle/>
-          <a:p>
-            <a:pPr>
-              <a:defRPr sz="3000" b="1">
-                <a:solidFill>
-                  <a:srgbClr val="222222"/>
-                </a:solidFill>
-                <a:latin typeface="Calibri"/>
-              </a:defRPr>
-            </a:pPr>
-            <a:r>
-              <a:t>Exercise 3: Seal Strength Experiment</a:t>
-            </a:r>
-          </a:p>
-        </p:txBody>
-      </p:sp>
-      <p:sp>
-        <p:nvSpPr>
-          <p:cNvPr id="5" name="TextBox 4"/>
-          <p:cNvSpPr txBox="1"/>
-          <p:nvPr/>
-        </p:nvSpPr>
-        <p:spPr>
-          <a:xfrm>
-            <a:off x="914400" y="1371600"/>
-            <a:ext cx="10058400" cy="5029200"/>
+            <a:off x="822960" y="1143000"/>
+            <a:ext cx="10424160" cy="4846320"/>
           </a:xfrm>
           <a:prstGeom prst="rect">
             <a:avLst/>
@@ -3802,177 +3798,197 @@
           <a:p>
             <a:pPr>
               <a:spcAft>
-                <a:spcPts val="600"/>
+                <a:spcPts val="500"/>
               </a:spcAft>
-              <a:defRPr sz="2000">
-                <a:solidFill>
-                  <a:srgbClr val="222222"/>
-                </a:solidFill>
-                <a:latin typeface="Calibri"/>
+              <a:defRPr sz="1700">
+                <a:solidFill>
+                  <a:srgbClr val="333333"/>
+                </a:solidFill>
+                <a:latin typeface="Inter"/>
               </a:defRPr>
             </a:pPr>
             <a:r>
               <a:t>1. Create the seal_strength experiment from the slide</a:t>
+            </a:r>
+          </a:p>
+          <a:p>
+            <a:pPr>
+              <a:spcAft>
+                <a:spcPts val="500"/>
+              </a:spcAft>
+              <a:defRPr sz="1700">
+                <a:solidFill>
+                  <a:srgbClr val="333333"/>
+                </a:solidFill>
+                <a:latin typeface="Inter"/>
+              </a:defRPr>
+            </a:pPr>
+            <a:r>
+              <a:t>2. Run:  doe generate seal_strength/</a:t>
+            </a:r>
+          </a:p>
+          <a:p>
+            <a:pPr>
+              <a:spcAft>
+                <a:spcPts val="500"/>
+              </a:spcAft>
+              <a:defRPr sz="1700">
+                <a:solidFill>
+                  <a:srgbClr val="333333"/>
+                </a:solidFill>
+                <a:latin typeface="Inter"/>
+              </a:defRPr>
+            </a:pPr>
+            <a:r>
+              <a:t>3. Run:  doe info seal_strength/  — how many runs?</a:t>
+            </a:r>
+          </a:p>
+          <a:p>
+            <a:pPr>
+              <a:spcAft>
+                <a:spcPts val="500"/>
+              </a:spcAft>
+              <a:defRPr sz="1700">
+                <a:solidFill>
+                  <a:srgbClr val="333333"/>
+                </a:solidFill>
+                <a:latin typeface="Inter"/>
+              </a:defRPr>
+            </a:pPr>
+            <a:r>
+              <a:t>4. Run the simulation:  bash seal_strength/run.sh</a:t>
+            </a:r>
+          </a:p>
+          <a:p>
+            <a:pPr>
+              <a:spcAft>
+                <a:spcPts val="500"/>
+              </a:spcAft>
+              <a:defRPr sz="1700">
+                <a:solidFill>
+                  <a:srgbClr val="333333"/>
+                </a:solidFill>
+                <a:latin typeface="Inter"/>
+              </a:defRPr>
+            </a:pPr>
+            <a:r>
+              <a:t>5. Run:  doe analyze seal_strength/</a:t>
+            </a:r>
+          </a:p>
+          <a:p>
+            <a:pPr>
+              <a:spcAft>
+                <a:spcPts val="500"/>
+              </a:spcAft>
+              <a:defRPr sz="1700">
+                <a:solidFill>
+                  <a:srgbClr val="333333"/>
+                </a:solidFill>
+                <a:latin typeface="Inter"/>
+              </a:defRPr>
+            </a:pPr>
+            <a:r>
+              <a:t>6. Answer these questions:</a:t>
             </a:r>
           </a:p>
           <a:p>
             <a:pPr lvl="1">
               <a:spcAft>
-                <a:spcPts val="600"/>
+                <a:spcPts val="500"/>
               </a:spcAft>
-              <a:defRPr sz="1800">
-                <a:solidFill>
-                  <a:srgbClr val="222222"/>
-                </a:solidFill>
-                <a:latin typeface="Calibri"/>
-              </a:defRPr>
-            </a:pPr>
-            <a:r>
-              <a:t>mkdir seal_strength &amp;&amp; create config.json as shown</a:t>
+              <a:defRPr sz="1500">
+                <a:solidFill>
+                  <a:srgbClr val="666666"/>
+                </a:solidFill>
+                <a:latin typeface="Inter"/>
+              </a:defRPr>
+            </a:pPr>
+            <a:r>
+              <a:t>Which factor has the largest main effect?</a:t>
+            </a:r>
+          </a:p>
+          <a:p>
+            <a:pPr lvl="1">
+              <a:spcAft>
+                <a:spcPts val="500"/>
+              </a:spcAft>
+              <a:defRPr sz="1500">
+                <a:solidFill>
+                  <a:srgbClr val="666666"/>
+                </a:solidFill>
+                <a:latin typeface="Inter"/>
+              </a:defRPr>
+            </a:pPr>
+            <a:r>
+              <a:t>Are there significant interactions?</a:t>
+            </a:r>
+          </a:p>
+          <a:p>
+            <a:pPr lvl="1">
+              <a:spcAft>
+                <a:spcPts val="500"/>
+              </a:spcAft>
+              <a:defRPr sz="1500">
+                <a:solidFill>
+                  <a:srgbClr val="666666"/>
+                </a:solidFill>
+                <a:latin typeface="Inter"/>
+              </a:defRPr>
+            </a:pPr>
+            <a:r>
+              <a:t>Is there evidence of curvature from center points?</a:t>
             </a:r>
           </a:p>
           <a:p>
             <a:pPr>
               <a:spcAft>
-                <a:spcPts val="600"/>
+                <a:spcPts val="500"/>
               </a:spcAft>
-              <a:defRPr sz="2000">
-                <a:solidFill>
-                  <a:srgbClr val="222222"/>
-                </a:solidFill>
-                <a:latin typeface="Calibri"/>
-              </a:defRPr>
-            </a:pPr>
-            <a:r>
-              <a:t>2. Run: doe generate seal_strength/</a:t>
-            </a:r>
-          </a:p>
-          <a:p>
-            <a:pPr>
-              <a:spcAft>
-                <a:spcPts val="600"/>
-              </a:spcAft>
-              <a:defRPr sz="2000">
-                <a:solidFill>
-                  <a:srgbClr val="222222"/>
-                </a:solidFill>
-                <a:latin typeface="Calibri"/>
-              </a:defRPr>
-            </a:pPr>
-            <a:r>
-              <a:t>3. Run: doe info seal_strength/  -- how many runs?</a:t>
-            </a:r>
-          </a:p>
-          <a:p>
-            <a:pPr>
-              <a:spcAft>
-                <a:spcPts val="600"/>
-              </a:spcAft>
-              <a:defRPr sz="2000">
-                <a:solidFill>
-                  <a:srgbClr val="222222"/>
-                </a:solidFill>
-                <a:latin typeface="Calibri"/>
-              </a:defRPr>
-            </a:pPr>
-            <a:r>
-              <a:t>4. Use the simulation script:  bash seal_strength/run.sh</a:t>
-            </a:r>
-          </a:p>
-          <a:p>
-            <a:pPr>
-              <a:spcAft>
-                <a:spcPts val="600"/>
-              </a:spcAft>
-              <a:defRPr sz="2000">
-                <a:solidFill>
-                  <a:srgbClr val="222222"/>
-                </a:solidFill>
-                <a:latin typeface="Calibri"/>
-              </a:defRPr>
-            </a:pPr>
-            <a:r>
-              <a:t>5. Run: doe analyze seal_strength/</a:t>
-            </a:r>
-          </a:p>
-          <a:p>
-            <a:pPr>
-              <a:spcAft>
-                <a:spcPts val="600"/>
-              </a:spcAft>
-              <a:defRPr sz="2000">
-                <a:solidFill>
-                  <a:srgbClr val="222222"/>
-                </a:solidFill>
-                <a:latin typeface="Calibri"/>
-              </a:defRPr>
-            </a:pPr>
-            <a:r>
-              <a:t>6. Answer these questions:</a:t>
-            </a:r>
-          </a:p>
-          <a:p>
-            <a:pPr lvl="1">
-              <a:spcAft>
-                <a:spcPts val="600"/>
-              </a:spcAft>
-              <a:defRPr sz="1800">
-                <a:solidFill>
-                  <a:srgbClr val="222222"/>
-                </a:solidFill>
-                <a:latin typeface="Calibri"/>
-              </a:defRPr>
-            </a:pPr>
-            <a:r>
-              <a:t>Which factor has the largest main effect?</a:t>
-            </a:r>
-          </a:p>
-          <a:p>
-            <a:pPr lvl="1">
-              <a:spcAft>
-                <a:spcPts val="600"/>
-              </a:spcAft>
-              <a:defRPr sz="1800">
-                <a:solidFill>
-                  <a:srgbClr val="222222"/>
-                </a:solidFill>
-                <a:latin typeface="Calibri"/>
-              </a:defRPr>
-            </a:pPr>
-            <a:r>
-              <a:t>Are there any significant interactions?</a:t>
-            </a:r>
-          </a:p>
-          <a:p>
-            <a:pPr lvl="1">
-              <a:spcAft>
-                <a:spcPts val="600"/>
-              </a:spcAft>
-              <a:defRPr sz="1800">
-                <a:solidFill>
-                  <a:srgbClr val="222222"/>
-                </a:solidFill>
-                <a:latin typeface="Calibri"/>
-              </a:defRPr>
-            </a:pPr>
-            <a:r>
-              <a:t>Is there evidence of curvature from center points?</a:t>
-            </a:r>
-          </a:p>
-          <a:p>
-            <a:pPr>
-              <a:spcAft>
-                <a:spcPts val="600"/>
-              </a:spcAft>
-              <a:defRPr sz="2000">
-                <a:solidFill>
-                  <a:srgbClr val="222222"/>
-                </a:solidFill>
-                <a:latin typeface="Calibri"/>
-              </a:defRPr>
-            </a:pPr>
-            <a:r>
-              <a:t>7. Run: doe report seal_strength/  -- open the HTML report</a:t>
+              <a:defRPr sz="1700">
+                <a:solidFill>
+                  <a:srgbClr val="333333"/>
+                </a:solidFill>
+                <a:latin typeface="Inter"/>
+              </a:defRPr>
+            </a:pPr>
+            <a:r>
+              <a:t>7. Run:  doe report seal_strength/  and open the HTML report</a:t>
+            </a:r>
+          </a:p>
+        </p:txBody>
+      </p:sp>
+      <p:sp>
+        <p:nvSpPr>
+          <p:cNvPr id="8" name="TextBox 7"/>
+          <p:cNvSpPr txBox="1"/>
+          <p:nvPr/>
+        </p:nvSpPr>
+        <p:spPr>
+          <a:xfrm>
+            <a:off x="731520" y="6400800"/>
+            <a:ext cx="10058400" cy="365760"/>
+          </a:xfrm>
+          <a:prstGeom prst="rect">
+            <a:avLst/>
+          </a:prstGeom>
+          <a:noFill/>
+        </p:spPr>
+        <p:txBody>
+          <a:bodyPr wrap="square">
+            <a:spAutoFit/>
+          </a:bodyPr>
+          <a:lstStyle/>
+          <a:p>
+            <a:pPr algn="l">
+              <a:defRPr sz="1000" b="0">
+                <a:solidFill>
+                  <a:srgbClr val="999999"/>
+                </a:solidFill>
+                <a:latin typeface="Consolas"/>
+              </a:defRPr>
+            </a:pPr>
+            <a:r>
+              <a:t>© 2026 Martin J. Gallagher  |  GPL-3.0-or-later  |  doehelper.com</a:t>
             </a:r>
           </a:p>
         </p:txBody>
@@ -3991,7 +4007,7 @@
     <p:bg>
       <p:bgPr>
         <a:solidFill>
-          <a:srgbClr val="FFFFFF"/>
+          <a:srgbClr val="FAFAFA"/>
         </a:solidFill>
         <a:effectLst/>
       </p:bgPr>
@@ -4012,13 +4028,13 @@
         <p:spPr>
           <a:xfrm>
             <a:off x="0" y="0"/>
-            <a:ext cx="12191695" cy="54864"/>
+            <a:ext cx="12191695" cy="45720"/>
           </a:xfrm>
           <a:prstGeom prst="rect">
             <a:avLst/>
           </a:prstGeom>
           <a:solidFill>
-            <a:srgbClr val="007BFF"/>
+            <a:srgbClr val="5046E5"/>
           </a:solidFill>
           <a:ln>
             <a:noFill/>
@@ -4048,14 +4064,57 @@
       </p:sp>
       <p:sp>
         <p:nvSpPr>
-          <p:cNvPr id="3" name="TextBox 2"/>
+          <p:cNvPr id="3" name="Rectangle 2"/>
+          <p:cNvSpPr/>
+          <p:nvPr/>
+        </p:nvSpPr>
+        <p:spPr>
+          <a:xfrm>
+            <a:off x="548640" y="411480"/>
+            <a:ext cx="36576" cy="502920"/>
+          </a:xfrm>
+          <a:prstGeom prst="rect">
+            <a:avLst/>
+          </a:prstGeom>
+          <a:solidFill>
+            <a:srgbClr val="5046E5"/>
+          </a:solidFill>
+          <a:ln>
+            <a:noFill/>
+          </a:ln>
+        </p:spPr>
+        <p:style>
+          <a:lnRef idx="1">
+            <a:schemeClr val="accent1"/>
+          </a:lnRef>
+          <a:fillRef idx="3">
+            <a:schemeClr val="accent1"/>
+          </a:fillRef>
+          <a:effectRef idx="2">
+            <a:schemeClr val="accent1"/>
+          </a:effectRef>
+          <a:fontRef idx="minor">
+            <a:schemeClr val="lt1"/>
+          </a:fontRef>
+        </p:style>
+        <p:txBody>
+          <a:bodyPr rtlCol="0" anchor="ctr"/>
+          <a:lstStyle/>
+          <a:p>
+            <a:pPr algn="ctr"/>
+          </a:p>
+        </p:txBody>
+      </p:sp>
+      <p:sp>
+        <p:nvSpPr>
+          <p:cNvPr id="4" name="TextBox 3"/>
           <p:cNvSpPr txBox="1"/>
           <p:nvPr/>
         </p:nvSpPr>
         <p:spPr>
           <a:xfrm>
-            <a:off x="731520" y="365760"/>
-            <a:ext cx="10515600" cy="822960"/>
+            <a:off x="777240" y="365760"/>
+            <a:ext cx="10058400" cy="640080"/>
           </a:xfrm>
           <a:prstGeom prst="rect">
             <a:avLst/>
@@ -4068,12 +4127,12 @@
           </a:bodyPr>
           <a:lstStyle/>
           <a:p>
-            <a:pPr>
-              <a:defRPr sz="3200" b="1">
-                <a:solidFill>
-                  <a:srgbClr val="222222"/>
-                </a:solidFill>
-                <a:latin typeface="Calibri"/>
+            <a:pPr algn="l">
+              <a:defRPr sz="2800" b="1">
+                <a:solidFill>
+                  <a:srgbClr val="111111"/>
+                </a:solidFill>
+                <a:latin typeface="Inter"/>
               </a:defRPr>
             </a:pPr>
             <a:r>
@@ -4084,14 +4143,14 @@
       </p:sp>
       <p:sp>
         <p:nvSpPr>
-          <p:cNvPr id="4" name="TextBox 3"/>
+          <p:cNvPr id="5" name="TextBox 4"/>
           <p:cNvSpPr txBox="1"/>
           <p:nvPr/>
         </p:nvSpPr>
         <p:spPr>
           <a:xfrm>
-            <a:off x="914400" y="1463040"/>
-            <a:ext cx="10058400" cy="4754880"/>
+            <a:off x="822960" y="1188720"/>
+            <a:ext cx="10241280" cy="5120640"/>
           </a:xfrm>
           <a:prstGeom prst="rect">
             <a:avLst/>
@@ -4106,29 +4165,29 @@
           <a:p>
             <a:pPr>
               <a:spcAft>
-                <a:spcPts val="800"/>
+                <a:spcPts val="600"/>
               </a:spcAft>
-              <a:defRPr sz="2200" b="0">
-                <a:solidFill>
-                  <a:srgbClr val="222222"/>
-                </a:solidFill>
-                <a:latin typeface="Calibri"/>
-              </a:defRPr>
-            </a:pPr>
-            <a:r>
-              <a:t>Understand full factorial (2^k) designs</a:t>
+              <a:defRPr sz="1900">
+                <a:solidFill>
+                  <a:srgbClr val="333333"/>
+                </a:solidFill>
+                <a:latin typeface="Inter"/>
+              </a:defRPr>
+            </a:pPr>
+            <a:r>
+              <a:t>Understand full factorial (2ᵏ) designs</a:t>
             </a:r>
           </a:p>
           <a:p>
             <a:pPr>
               <a:spcAft>
-                <a:spcPts val="800"/>
+                <a:spcPts val="600"/>
               </a:spcAft>
-              <a:defRPr sz="2200" b="0">
-                <a:solidFill>
-                  <a:srgbClr val="222222"/>
-                </a:solidFill>
-                <a:latin typeface="Calibri"/>
+              <a:defRPr sz="1900">
+                <a:solidFill>
+                  <a:srgbClr val="333333"/>
+                </a:solidFill>
+                <a:latin typeface="Inter"/>
               </a:defRPr>
             </a:pPr>
             <a:r>
@@ -4138,13 +4197,13 @@
           <a:p>
             <a:pPr>
               <a:spcAft>
-                <a:spcPts val="800"/>
+                <a:spcPts val="600"/>
               </a:spcAft>
-              <a:defRPr sz="2200" b="0">
-                <a:solidFill>
-                  <a:srgbClr val="222222"/>
-                </a:solidFill>
-                <a:latin typeface="Calibri"/>
+              <a:defRPr sz="1900">
+                <a:solidFill>
+                  <a:srgbClr val="333333"/>
+                </a:solidFill>
+                <a:latin typeface="Inter"/>
               </a:defRPr>
             </a:pPr>
             <a:r>
@@ -4154,13 +4213,13 @@
           <a:p>
             <a:pPr>
               <a:spcAft>
-                <a:spcPts val="800"/>
+                <a:spcPts val="600"/>
               </a:spcAft>
-              <a:defRPr sz="2200" b="0">
-                <a:solidFill>
-                  <a:srgbClr val="222222"/>
-                </a:solidFill>
-                <a:latin typeface="Calibri"/>
+              <a:defRPr sz="1900">
+                <a:solidFill>
+                  <a:srgbClr val="333333"/>
+                </a:solidFill>
+                <a:latin typeface="Inter"/>
               </a:defRPr>
             </a:pPr>
             <a:r>
@@ -4170,13 +4229,13 @@
           <a:p>
             <a:pPr>
               <a:spcAft>
-                <a:spcPts val="800"/>
+                <a:spcPts val="600"/>
               </a:spcAft>
-              <a:defRPr sz="2200" b="0">
-                <a:solidFill>
-                  <a:srgbClr val="222222"/>
-                </a:solidFill>
-                <a:latin typeface="Calibri"/>
+              <a:defRPr sz="1900">
+                <a:solidFill>
+                  <a:srgbClr val="333333"/>
+                </a:solidFill>
+                <a:latin typeface="Inter"/>
               </a:defRPr>
             </a:pPr>
             <a:r>
@@ -4186,17 +4245,53 @@
           <a:p>
             <a:pPr>
               <a:spcAft>
-                <a:spcPts val="800"/>
+                <a:spcPts val="600"/>
               </a:spcAft>
-              <a:defRPr sz="2200" b="0">
-                <a:solidFill>
-                  <a:srgbClr val="222222"/>
-                </a:solidFill>
-                <a:latin typeface="Calibri"/>
+              <a:defRPr sz="1900">
+                <a:solidFill>
+                  <a:srgbClr val="333333"/>
+                </a:solidFill>
+                <a:latin typeface="Inter"/>
               </a:defRPr>
             </a:pPr>
             <a:r>
               <a:t>Know when full factorial is the right choice</a:t>
+            </a:r>
+          </a:p>
+        </p:txBody>
+      </p:sp>
+      <p:sp>
+        <p:nvSpPr>
+          <p:cNvPr id="6" name="TextBox 5"/>
+          <p:cNvSpPr txBox="1"/>
+          <p:nvPr/>
+        </p:nvSpPr>
+        <p:spPr>
+          <a:xfrm>
+            <a:off x="731520" y="6400800"/>
+            <a:ext cx="10058400" cy="365760"/>
+          </a:xfrm>
+          <a:prstGeom prst="rect">
+            <a:avLst/>
+          </a:prstGeom>
+          <a:noFill/>
+        </p:spPr>
+        <p:txBody>
+          <a:bodyPr wrap="square">
+            <a:spAutoFit/>
+          </a:bodyPr>
+          <a:lstStyle/>
+          <a:p>
+            <a:pPr algn="l">
+              <a:defRPr sz="1000" b="0">
+                <a:solidFill>
+                  <a:srgbClr val="999999"/>
+                </a:solidFill>
+                <a:latin typeface="Consolas"/>
+              </a:defRPr>
+            </a:pPr>
+            <a:r>
+              <a:t>© 2026 Martin J. Gallagher  |  GPL-3.0-or-later  |  doehelper.com</a:t>
             </a:r>
           </a:p>
         </p:txBody>
@@ -4215,7 +4310,7 @@
     <p:bg>
       <p:bgPr>
         <a:solidFill>
-          <a:srgbClr val="FFFFFF"/>
+          <a:srgbClr val="FAFAFA"/>
         </a:solidFill>
         <a:effectLst/>
       </p:bgPr>
@@ -4236,13 +4331,13 @@
         <p:spPr>
           <a:xfrm>
             <a:off x="0" y="0"/>
-            <a:ext cx="12191695" cy="54864"/>
+            <a:ext cx="12191695" cy="45720"/>
           </a:xfrm>
           <a:prstGeom prst="rect">
             <a:avLst/>
           </a:prstGeom>
           <a:solidFill>
-            <a:srgbClr val="007BFF"/>
+            <a:srgbClr val="5046E5"/>
           </a:solidFill>
           <a:ln>
             <a:noFill/>
@@ -4272,14 +4367,57 @@
       </p:sp>
       <p:sp>
         <p:nvSpPr>
-          <p:cNvPr id="3" name="TextBox 2"/>
+          <p:cNvPr id="3" name="Rectangle 2"/>
+          <p:cNvSpPr/>
+          <p:nvPr/>
+        </p:nvSpPr>
+        <p:spPr>
+          <a:xfrm>
+            <a:off x="548640" y="411480"/>
+            <a:ext cx="36576" cy="502920"/>
+          </a:xfrm>
+          <a:prstGeom prst="rect">
+            <a:avLst/>
+          </a:prstGeom>
+          <a:solidFill>
+            <a:srgbClr val="5046E5"/>
+          </a:solidFill>
+          <a:ln>
+            <a:noFill/>
+          </a:ln>
+        </p:spPr>
+        <p:style>
+          <a:lnRef idx="1">
+            <a:schemeClr val="accent1"/>
+          </a:lnRef>
+          <a:fillRef idx="3">
+            <a:schemeClr val="accent1"/>
+          </a:fillRef>
+          <a:effectRef idx="2">
+            <a:schemeClr val="accent1"/>
+          </a:effectRef>
+          <a:fontRef idx="minor">
+            <a:schemeClr val="lt1"/>
+          </a:fontRef>
+        </p:style>
+        <p:txBody>
+          <a:bodyPr rtlCol="0" anchor="ctr"/>
+          <a:lstStyle/>
+          <a:p>
+            <a:pPr algn="ctr"/>
+          </a:p>
+        </p:txBody>
+      </p:sp>
+      <p:sp>
+        <p:nvSpPr>
+          <p:cNvPr id="4" name="TextBox 3"/>
           <p:cNvSpPr txBox="1"/>
           <p:nvPr/>
         </p:nvSpPr>
         <p:spPr>
           <a:xfrm>
-            <a:off x="731520" y="365760"/>
-            <a:ext cx="10515600" cy="822960"/>
+            <a:off x="777240" y="365760"/>
+            <a:ext cx="10058400" cy="640080"/>
           </a:xfrm>
           <a:prstGeom prst="rect">
             <a:avLst/>
@@ -4292,12 +4430,12 @@
           </a:bodyPr>
           <a:lstStyle/>
           <a:p>
-            <a:pPr>
-              <a:defRPr sz="3200" b="1">
-                <a:solidFill>
-                  <a:srgbClr val="222222"/>
-                </a:solidFill>
-                <a:latin typeface="Calibri"/>
+            <a:pPr algn="l">
+              <a:defRPr sz="2800" b="1">
+                <a:solidFill>
+                  <a:srgbClr val="111111"/>
+                </a:solidFill>
+                <a:latin typeface="Inter"/>
               </a:defRPr>
             </a:pPr>
             <a:r>
@@ -4308,14 +4446,14 @@
       </p:sp>
       <p:sp>
         <p:nvSpPr>
-          <p:cNvPr id="4" name="TextBox 3"/>
+          <p:cNvPr id="5" name="TextBox 4"/>
           <p:cNvSpPr txBox="1"/>
           <p:nvPr/>
         </p:nvSpPr>
         <p:spPr>
           <a:xfrm>
-            <a:off x="914400" y="1463040"/>
-            <a:ext cx="10058400" cy="4754880"/>
+            <a:off x="822960" y="1188720"/>
+            <a:ext cx="10241280" cy="5120640"/>
           </a:xfrm>
           <a:prstGeom prst="rect">
             <a:avLst/>
@@ -4330,13 +4468,13 @@
           <a:p>
             <a:pPr>
               <a:spcAft>
-                <a:spcPts val="800"/>
+                <a:spcPts val="600"/>
               </a:spcAft>
-              <a:defRPr sz="2200" b="0">
-                <a:solidFill>
-                  <a:srgbClr val="222222"/>
-                </a:solidFill>
-                <a:latin typeface="Calibri"/>
+              <a:defRPr sz="1900">
+                <a:solidFill>
+                  <a:srgbClr val="333333"/>
+                </a:solidFill>
+                <a:latin typeface="Inter"/>
               </a:defRPr>
             </a:pPr>
             <a:r>
@@ -4346,129 +4484,133 @@
           <a:p>
             <a:pPr>
               <a:spcAft>
-                <a:spcPts val="800"/>
+                <a:spcPts val="600"/>
               </a:spcAft>
-              <a:defRPr sz="2200" b="0">
-                <a:solidFill>
-                  <a:srgbClr val="222222"/>
-                </a:solidFill>
-                <a:latin typeface="Calibri"/>
-              </a:defRPr>
-            </a:pPr>
-            <a:r>
-              <a:t>For k factors at 2 levels: 2^k runs</a:t>
+              <a:defRPr sz="1900">
+                <a:solidFill>
+                  <a:srgbClr val="333333"/>
+                </a:solidFill>
+                <a:latin typeface="Inter"/>
+              </a:defRPr>
+            </a:pPr>
+            <a:r>
+              <a:t>For k factors at 2 levels: 2ᵏ runs</a:t>
             </a:r>
           </a:p>
           <a:p>
             <a:pPr lvl="1">
               <a:spcAft>
-                <a:spcPts val="800"/>
+                <a:spcPts val="600"/>
+              </a:spcAft>
+              <a:defRPr sz="1700">
+                <a:solidFill>
+                  <a:srgbClr val="666666"/>
+                </a:solidFill>
+                <a:latin typeface="Inter"/>
+              </a:defRPr>
+            </a:pPr>
+            <a:r>
+              <a:t>2 factors: 4 runs   |   3 factors: 8 runs</a:t>
+            </a:r>
+          </a:p>
+          <a:p>
+            <a:pPr lvl="1">
+              <a:spcAft>
+                <a:spcPts val="600"/>
+              </a:spcAft>
+              <a:defRPr sz="1700">
+                <a:solidFill>
+                  <a:srgbClr val="666666"/>
+                </a:solidFill>
+                <a:latin typeface="Inter"/>
+              </a:defRPr>
+            </a:pPr>
+            <a:r>
+              <a:t>4 factors: 16 runs  |   5 factors: 32 runs</a:t>
+            </a:r>
+          </a:p>
+          <a:p>
+            <a:pPr>
+              <a:spcAft>
+                <a:spcPts val="600"/>
               </a:spcAft>
               <a:defRPr sz="1900">
                 <a:solidFill>
-                  <a:srgbClr val="222222"/>
-                </a:solidFill>
-                <a:latin typeface="Calibri"/>
-              </a:defRPr>
-            </a:pPr>
-            <a:r>
-              <a:t>2 factors: 4 runs</a:t>
-            </a:r>
-          </a:p>
-          <a:p>
-            <a:pPr lvl="1">
+                  <a:srgbClr val="333333"/>
+                </a:solidFill>
+                <a:latin typeface="Inter"/>
+              </a:defRPr>
+            </a:pPr>
+            <a:r>
+              <a:t>Estimates ALL main effects and ALL interactions</a:t>
+            </a:r>
+          </a:p>
+          <a:p>
+            <a:pPr>
               <a:spcAft>
-                <a:spcPts val="800"/>
+                <a:spcPts val="600"/>
               </a:spcAft>
               <a:defRPr sz="1900">
                 <a:solidFill>
-                  <a:srgbClr val="222222"/>
-                </a:solidFill>
-                <a:latin typeface="Calibri"/>
-              </a:defRPr>
-            </a:pPr>
-            <a:r>
-              <a:t>3 factors: 8 runs</a:t>
-            </a:r>
-          </a:p>
-          <a:p>
-            <a:pPr lvl="1">
+                  <a:srgbClr val="333333"/>
+                </a:solidFill>
+                <a:latin typeface="Inter"/>
+              </a:defRPr>
+            </a:pPr>
+            <a:r>
+              <a:t>The "gold standard" of experimental designs</a:t>
+            </a:r>
+          </a:p>
+          <a:p>
+            <a:pPr>
               <a:spcAft>
-                <a:spcPts val="800"/>
+                <a:spcPts val="600"/>
               </a:spcAft>
               <a:defRPr sz="1900">
                 <a:solidFill>
-                  <a:srgbClr val="222222"/>
-                </a:solidFill>
-                <a:latin typeface="Calibri"/>
-              </a:defRPr>
-            </a:pPr>
-            <a:r>
-              <a:t>4 factors: 16 runs</a:t>
-            </a:r>
-          </a:p>
-          <a:p>
-            <a:pPr lvl="1">
-              <a:spcAft>
-                <a:spcPts val="800"/>
-              </a:spcAft>
-              <a:defRPr sz="1900">
-                <a:solidFill>
-                  <a:srgbClr val="222222"/>
-                </a:solidFill>
-                <a:latin typeface="Calibri"/>
-              </a:defRPr>
-            </a:pPr>
-            <a:r>
-              <a:t>5 factors: 32 runs</a:t>
-            </a:r>
-          </a:p>
-          <a:p>
-            <a:pPr>
-              <a:spcAft>
-                <a:spcPts val="800"/>
-              </a:spcAft>
-              <a:defRPr sz="2200" b="0">
-                <a:solidFill>
-                  <a:srgbClr val="222222"/>
-                </a:solidFill>
-                <a:latin typeface="Calibri"/>
-              </a:defRPr>
-            </a:pPr>
-            <a:r>
-              <a:t>Estimates ALL main effects and ALL interactions</a:t>
-            </a:r>
-          </a:p>
-          <a:p>
-            <a:pPr>
-              <a:spcAft>
-                <a:spcPts val="800"/>
-              </a:spcAft>
-              <a:defRPr sz="2200" b="0">
-                <a:solidFill>
-                  <a:srgbClr val="222222"/>
-                </a:solidFill>
-                <a:latin typeface="Calibri"/>
-              </a:defRPr>
-            </a:pPr>
-            <a:r>
-              <a:t>The "gold standard" of experimental designs</a:t>
-            </a:r>
-          </a:p>
-          <a:p>
-            <a:pPr>
-              <a:spcAft>
-                <a:spcPts val="800"/>
-              </a:spcAft>
-              <a:defRPr sz="2200" b="0">
-                <a:solidFill>
-                  <a:srgbClr val="222222"/>
-                </a:solidFill>
-                <a:latin typeface="Calibri"/>
-              </a:defRPr>
-            </a:pPr>
-            <a:r>
-              <a:t>Practical limit: ~5-6 factors (32-64 runs)</a:t>
+                  <a:srgbClr val="333333"/>
+                </a:solidFill>
+                <a:latin typeface="Inter"/>
+              </a:defRPr>
+            </a:pPr>
+            <a:r>
+              <a:t>Practical limit: ≤5–6 factors (32–64 runs)</a:t>
+            </a:r>
+          </a:p>
+        </p:txBody>
+      </p:sp>
+      <p:sp>
+        <p:nvSpPr>
+          <p:cNvPr id="6" name="TextBox 5"/>
+          <p:cNvSpPr txBox="1"/>
+          <p:nvPr/>
+        </p:nvSpPr>
+        <p:spPr>
+          <a:xfrm>
+            <a:off x="731520" y="6400800"/>
+            <a:ext cx="10058400" cy="365760"/>
+          </a:xfrm>
+          <a:prstGeom prst="rect">
+            <a:avLst/>
+          </a:prstGeom>
+          <a:noFill/>
+        </p:spPr>
+        <p:txBody>
+          <a:bodyPr wrap="square">
+            <a:spAutoFit/>
+          </a:bodyPr>
+          <a:lstStyle/>
+          <a:p>
+            <a:pPr algn="l">
+              <a:defRPr sz="1000" b="0">
+                <a:solidFill>
+                  <a:srgbClr val="999999"/>
+                </a:solidFill>
+                <a:latin typeface="Consolas"/>
+              </a:defRPr>
+            </a:pPr>
+            <a:r>
+              <a:t>© 2026 Martin J. Gallagher  |  GPL-3.0-or-later  |  doehelper.com</a:t>
             </a:r>
           </a:p>
         </p:txBody>
@@ -4487,7 +4629,7 @@
     <p:bg>
       <p:bgPr>
         <a:solidFill>
-          <a:srgbClr val="FFFFFF"/>
+          <a:srgbClr val="FAFAFA"/>
         </a:solidFill>
         <a:effectLst/>
       </p:bgPr>
@@ -4508,13 +4650,13 @@
         <p:spPr>
           <a:xfrm>
             <a:off x="0" y="0"/>
-            <a:ext cx="12191695" cy="54864"/>
+            <a:ext cx="12191695" cy="45720"/>
           </a:xfrm>
           <a:prstGeom prst="rect">
             <a:avLst/>
           </a:prstGeom>
           <a:solidFill>
-            <a:srgbClr val="007BFF"/>
+            <a:srgbClr val="5046E5"/>
           </a:solidFill>
           <a:ln>
             <a:noFill/>
@@ -4544,37 +4686,44 @@
       </p:sp>
       <p:sp>
         <p:nvSpPr>
-          <p:cNvPr id="3" name="TextBox 2"/>
-          <p:cNvSpPr txBox="1"/>
+          <p:cNvPr id="3" name="Rectangle 2"/>
+          <p:cNvSpPr/>
           <p:nvPr/>
         </p:nvSpPr>
         <p:spPr>
           <a:xfrm>
-            <a:off x="731520" y="365760"/>
-            <a:ext cx="10515600" cy="822960"/>
+            <a:off x="548640" y="411480"/>
+            <a:ext cx="36576" cy="502920"/>
           </a:xfrm>
           <a:prstGeom prst="rect">
             <a:avLst/>
           </a:prstGeom>
-          <a:noFill/>
-        </p:spPr>
-        <p:txBody>
-          <a:bodyPr wrap="none">
-            <a:spAutoFit/>
-          </a:bodyPr>
-          <a:lstStyle/>
-          <a:p>
-            <a:pPr>
-              <a:defRPr sz="3200" b="1">
-                <a:solidFill>
-                  <a:srgbClr val="222222"/>
-                </a:solidFill>
-                <a:latin typeface="Calibri"/>
-              </a:defRPr>
-            </a:pPr>
-            <a:r>
-              <a:t>2^2 Full Factorial Example</a:t>
-            </a:r>
+          <a:solidFill>
+            <a:srgbClr val="5046E5"/>
+          </a:solidFill>
+          <a:ln>
+            <a:noFill/>
+          </a:ln>
+        </p:spPr>
+        <p:style>
+          <a:lnRef idx="1">
+            <a:schemeClr val="accent1"/>
+          </a:lnRef>
+          <a:fillRef idx="3">
+            <a:schemeClr val="accent1"/>
+          </a:fillRef>
+          <a:effectRef idx="2">
+            <a:schemeClr val="accent1"/>
+          </a:effectRef>
+          <a:fontRef idx="minor">
+            <a:schemeClr val="lt1"/>
+          </a:fontRef>
+        </p:style>
+        <p:txBody>
+          <a:bodyPr rtlCol="0" anchor="ctr"/>
+          <a:lstStyle/>
+          <a:p>
+            <a:pPr algn="ctr"/>
           </a:p>
         </p:txBody>
       </p:sp>
@@ -4586,44 +4735,8 @@
         </p:nvSpPr>
         <p:spPr>
           <a:xfrm>
-            <a:off x="731520" y="1280160"/>
-            <a:ext cx="5029200" cy="457200"/>
-          </a:xfrm>
-          <a:prstGeom prst="rect">
-            <a:avLst/>
-          </a:prstGeom>
-          <a:noFill/>
-        </p:spPr>
-        <p:txBody>
-          <a:bodyPr wrap="none">
-            <a:spAutoFit/>
-          </a:bodyPr>
-          <a:lstStyle/>
-          <a:p>
-            <a:pPr>
-              <a:defRPr sz="2200" b="1">
-                <a:solidFill>
-                  <a:srgbClr val="007BFF"/>
-                </a:solidFill>
-                <a:latin typeface="Calibri"/>
-              </a:defRPr>
-            </a:pPr>
-            <a:r>
-              <a:t>Design Matrix &amp; Results</a:t>
-            </a:r>
-          </a:p>
-        </p:txBody>
-      </p:sp>
-      <p:sp>
-        <p:nvSpPr>
-          <p:cNvPr id="5" name="TextBox 4"/>
-          <p:cNvSpPr txBox="1"/>
-          <p:nvPr/>
-        </p:nvSpPr>
-        <p:spPr>
-          <a:xfrm>
-            <a:off x="731520" y="1828800"/>
-            <a:ext cx="5029200" cy="4572000"/>
+            <a:off x="777240" y="365760"/>
+            <a:ext cx="10058400" cy="640080"/>
           </a:xfrm>
           <a:prstGeom prst="rect">
             <a:avLst/>
@@ -4636,149 +4749,103 @@
           </a:bodyPr>
           <a:lstStyle/>
           <a:p>
-            <a:pPr>
-              <a:spcAft>
-                <a:spcPts val="600"/>
-              </a:spcAft>
-              <a:defRPr sz="2000">
-                <a:solidFill>
-                  <a:srgbClr val="222222"/>
-                </a:solidFill>
-                <a:latin typeface="Calibri"/>
-              </a:defRPr>
-            </a:pPr>
-            <a:r>
-              <a:t>Factor A: Temperature (150, 200)</a:t>
-            </a:r>
-          </a:p>
-          <a:p>
-            <a:pPr>
-              <a:spcAft>
-                <a:spcPts val="600"/>
-              </a:spcAft>
-              <a:defRPr sz="2000">
-                <a:solidFill>
-                  <a:srgbClr val="222222"/>
-                </a:solidFill>
-                <a:latin typeface="Calibri"/>
-              </a:defRPr>
-            </a:pPr>
-            <a:r>
-              <a:t>Factor B: Pressure (1, 5)</a:t>
-            </a:r>
-          </a:p>
-          <a:p>
-            <a:pPr>
-              <a:spcAft>
-                <a:spcPts val="600"/>
-              </a:spcAft>
-              <a:defRPr sz="2000">
-                <a:solidFill>
-                  <a:srgbClr val="222222"/>
-                </a:solidFill>
-                <a:latin typeface="Calibri"/>
-              </a:defRPr>
-            </a:pPr>
-          </a:p>
-          <a:p>
-            <a:pPr>
-              <a:spcAft>
-                <a:spcPts val="600"/>
-              </a:spcAft>
-              <a:defRPr sz="2000">
-                <a:solidFill>
-                  <a:srgbClr val="222222"/>
-                </a:solidFill>
-                <a:latin typeface="Calibri"/>
-              </a:defRPr>
-            </a:pPr>
-            <a:r>
-              <a:t>Run 1: A=low,  B=low   -&gt; 62%</a:t>
-            </a:r>
-          </a:p>
-          <a:p>
-            <a:pPr>
-              <a:spcAft>
-                <a:spcPts val="600"/>
-              </a:spcAft>
-              <a:defRPr sz="2000">
-                <a:solidFill>
-                  <a:srgbClr val="222222"/>
-                </a:solidFill>
-                <a:latin typeface="Calibri"/>
-              </a:defRPr>
-            </a:pPr>
-            <a:r>
-              <a:t>Run 2: A=high, B=low   -&gt; 74%</a:t>
-            </a:r>
-          </a:p>
-          <a:p>
-            <a:pPr>
-              <a:spcAft>
-                <a:spcPts val="600"/>
-              </a:spcAft>
-              <a:defRPr sz="2000">
-                <a:solidFill>
-                  <a:srgbClr val="222222"/>
-                </a:solidFill>
-                <a:latin typeface="Calibri"/>
-              </a:defRPr>
-            </a:pPr>
-            <a:r>
-              <a:t>Run 3: A=low,  B=high  -&gt; 68%</a:t>
-            </a:r>
-          </a:p>
-          <a:p>
-            <a:pPr>
-              <a:spcAft>
-                <a:spcPts val="600"/>
-              </a:spcAft>
-              <a:defRPr sz="2000">
-                <a:solidFill>
-                  <a:srgbClr val="222222"/>
-                </a:solidFill>
-                <a:latin typeface="Calibri"/>
-              </a:defRPr>
-            </a:pPr>
-            <a:r>
-              <a:t>Run 4: A=high, B=high  -&gt; 91%</a:t>
-            </a:r>
-          </a:p>
-        </p:txBody>
-      </p:sp>
-      <p:sp>
-        <p:nvSpPr>
-          <p:cNvPr id="6" name="TextBox 5"/>
-          <p:cNvSpPr txBox="1"/>
+            <a:pPr algn="l">
+              <a:defRPr sz="2800" b="1">
+                <a:solidFill>
+                  <a:srgbClr val="111111"/>
+                </a:solidFill>
+                <a:latin typeface="Inter"/>
+              </a:defRPr>
+            </a:pPr>
+            <a:r>
+              <a:t>2² Full Factorial Example</a:t>
+            </a:r>
+          </a:p>
+        </p:txBody>
+      </p:sp>
+      <p:sp>
+        <p:nvSpPr>
+          <p:cNvPr id="5" name="Rounded Rectangle 4"/>
+          <p:cNvSpPr/>
           <p:nvPr/>
         </p:nvSpPr>
         <p:spPr>
           <a:xfrm>
-            <a:off x="6400800" y="1280160"/>
-            <a:ext cx="5029200" cy="457200"/>
+            <a:off x="548640" y="1188720"/>
+            <a:ext cx="5303520" cy="4937760"/>
+          </a:xfrm>
+          <a:prstGeom prst="roundRect">
+            <a:avLst/>
+          </a:prstGeom>
+          <a:solidFill>
+            <a:srgbClr val="F0FDF4"/>
+          </a:solidFill>
+          <a:ln>
+            <a:noFill/>
+          </a:ln>
+        </p:spPr>
+        <p:style>
+          <a:lnRef idx="1">
+            <a:schemeClr val="accent1"/>
+          </a:lnRef>
+          <a:fillRef idx="3">
+            <a:schemeClr val="accent1"/>
+          </a:fillRef>
+          <a:effectRef idx="2">
+            <a:schemeClr val="accent1"/>
+          </a:effectRef>
+          <a:fontRef idx="minor">
+            <a:schemeClr val="lt1"/>
+          </a:fontRef>
+        </p:style>
+        <p:txBody>
+          <a:bodyPr rtlCol="0" anchor="ctr"/>
+          <a:lstStyle/>
+          <a:p>
+            <a:pPr algn="ctr"/>
+          </a:p>
+        </p:txBody>
+      </p:sp>
+      <p:sp>
+        <p:nvSpPr>
+          <p:cNvPr id="6" name="Rectangle 5"/>
+          <p:cNvSpPr/>
+          <p:nvPr/>
+        </p:nvSpPr>
+        <p:spPr>
+          <a:xfrm>
+            <a:off x="548640" y="1188720"/>
+            <a:ext cx="36576" cy="4937760"/>
           </a:xfrm>
           <a:prstGeom prst="rect">
             <a:avLst/>
           </a:prstGeom>
-          <a:noFill/>
-        </p:spPr>
-        <p:txBody>
-          <a:bodyPr wrap="none">
-            <a:spAutoFit/>
-          </a:bodyPr>
-          <a:lstStyle/>
-          <a:p>
-            <a:pPr>
-              <a:defRPr sz="2200" b="1">
-                <a:solidFill>
-                  <a:srgbClr val="00C853"/>
-                </a:solidFill>
-                <a:latin typeface="Calibri"/>
-              </a:defRPr>
-            </a:pPr>
-            <a:r>
-              <a:t>Effect Calculations</a:t>
-            </a:r>
+          <a:solidFill>
+            <a:srgbClr val="16A34A"/>
+          </a:solidFill>
+          <a:ln>
+            <a:noFill/>
+          </a:ln>
+        </p:spPr>
+        <p:style>
+          <a:lnRef idx="1">
+            <a:schemeClr val="accent1"/>
+          </a:lnRef>
+          <a:fillRef idx="3">
+            <a:schemeClr val="accent1"/>
+          </a:fillRef>
+          <a:effectRef idx="2">
+            <a:schemeClr val="accent1"/>
+          </a:effectRef>
+          <a:fontRef idx="minor">
+            <a:schemeClr val="lt1"/>
+          </a:fontRef>
+        </p:style>
+        <p:txBody>
+          <a:bodyPr rtlCol="0" anchor="ctr"/>
+          <a:lstStyle/>
+          <a:p>
+            <a:pPr algn="ctr"/>
           </a:p>
         </p:txBody>
       </p:sp>
@@ -4790,8 +4857,8 @@
         </p:nvSpPr>
         <p:spPr>
           <a:xfrm>
-            <a:off x="6400800" y="1828800"/>
-            <a:ext cx="5029200" cy="4572000"/>
+            <a:off x="822960" y="1325880"/>
+            <a:ext cx="4754880" cy="365760"/>
           </a:xfrm>
           <a:prstGeom prst="rect">
             <a:avLst/>
@@ -4804,125 +4871,451 @@
           </a:bodyPr>
           <a:lstStyle/>
           <a:p>
+            <a:pPr algn="l">
+              <a:defRPr sz="1600" b="1">
+                <a:solidFill>
+                  <a:srgbClr val="16A34A"/>
+                </a:solidFill>
+                <a:latin typeface="Consolas"/>
+              </a:defRPr>
+            </a:pPr>
+            <a:r>
+              <a:t>DESIGN MATRIX &amp; RESULTS</a:t>
+            </a:r>
+          </a:p>
+        </p:txBody>
+      </p:sp>
+      <p:sp>
+        <p:nvSpPr>
+          <p:cNvPr id="8" name="TextBox 7"/>
+          <p:cNvSpPr txBox="1"/>
+          <p:nvPr/>
+        </p:nvSpPr>
+        <p:spPr>
+          <a:xfrm>
+            <a:off x="822960" y="1737360"/>
+            <a:ext cx="4754880" cy="4114800"/>
+          </a:xfrm>
+          <a:prstGeom prst="rect">
+            <a:avLst/>
+          </a:prstGeom>
+          <a:noFill/>
+        </p:spPr>
+        <p:txBody>
+          <a:bodyPr wrap="square">
+            <a:spAutoFit/>
+          </a:bodyPr>
+          <a:lstStyle/>
+          <a:p>
             <a:pPr>
               <a:spcAft>
-                <a:spcPts val="600"/>
+                <a:spcPts val="500"/>
               </a:spcAft>
-              <a:defRPr sz="2000">
-                <a:solidFill>
-                  <a:srgbClr val="222222"/>
-                </a:solidFill>
-                <a:latin typeface="Calibri"/>
-              </a:defRPr>
-            </a:pPr>
-            <a:r>
-              <a:t>Main effect A = [(74+91)-(62+68)]/2</a:t>
+              <a:defRPr sz="1700">
+                <a:solidFill>
+                  <a:srgbClr val="333333"/>
+                </a:solidFill>
+                <a:latin typeface="Inter"/>
+              </a:defRPr>
+            </a:pPr>
+            <a:r>
+              <a:t>Factor A: Temperature (150, 200)</a:t>
             </a:r>
           </a:p>
           <a:p>
             <a:pPr>
               <a:spcAft>
-                <a:spcPts val="600"/>
+                <a:spcPts val="500"/>
               </a:spcAft>
-              <a:defRPr sz="2000">
-                <a:solidFill>
-                  <a:srgbClr val="222222"/>
-                </a:solidFill>
-                <a:latin typeface="Calibri"/>
-              </a:defRPr>
-            </a:pPr>
-            <a:r>
-              <a:t>  = 17.5% (Temperature matters)</a:t>
+              <a:defRPr sz="1700">
+                <a:solidFill>
+                  <a:srgbClr val="333333"/>
+                </a:solidFill>
+                <a:latin typeface="Inter"/>
+              </a:defRPr>
+            </a:pPr>
+            <a:r>
+              <a:t>Factor B: Pressure (1, 5)</a:t>
             </a:r>
           </a:p>
           <a:p>
             <a:pPr>
               <a:spcAft>
-                <a:spcPts val="600"/>
+                <a:spcPts val="500"/>
               </a:spcAft>
-              <a:defRPr sz="2000">
-                <a:solidFill>
-                  <a:srgbClr val="222222"/>
-                </a:solidFill>
-                <a:latin typeface="Calibri"/>
+              <a:defRPr sz="1700">
+                <a:solidFill>
+                  <a:srgbClr val="333333"/>
+                </a:solidFill>
+                <a:latin typeface="Inter"/>
               </a:defRPr>
             </a:pPr>
           </a:p>
           <a:p>
             <a:pPr>
               <a:spcAft>
-                <a:spcPts val="600"/>
+                <a:spcPts val="500"/>
               </a:spcAft>
-              <a:defRPr sz="2000">
-                <a:solidFill>
-                  <a:srgbClr val="222222"/>
-                </a:solidFill>
-                <a:latin typeface="Calibri"/>
-              </a:defRPr>
-            </a:pPr>
-            <a:r>
-              <a:t>Main effect B = [(68+91)-(62+74)]/2</a:t>
+              <a:defRPr sz="1700">
+                <a:solidFill>
+                  <a:srgbClr val="333333"/>
+                </a:solidFill>
+                <a:latin typeface="Inter"/>
+              </a:defRPr>
+            </a:pPr>
+            <a:r>
+              <a:t>Run 1: A=low,  B=low   → 62%</a:t>
             </a:r>
           </a:p>
           <a:p>
             <a:pPr>
               <a:spcAft>
-                <a:spcPts val="600"/>
+                <a:spcPts val="500"/>
               </a:spcAft>
-              <a:defRPr sz="2000">
-                <a:solidFill>
-                  <a:srgbClr val="222222"/>
-                </a:solidFill>
-                <a:latin typeface="Calibri"/>
-              </a:defRPr>
-            </a:pPr>
-            <a:r>
-              <a:t>  = 11.5% (Pressure matters)</a:t>
+              <a:defRPr sz="1700">
+                <a:solidFill>
+                  <a:srgbClr val="333333"/>
+                </a:solidFill>
+                <a:latin typeface="Inter"/>
+              </a:defRPr>
+            </a:pPr>
+            <a:r>
+              <a:t>Run 2: A=high, B=low   → 74%</a:t>
             </a:r>
           </a:p>
           <a:p>
             <a:pPr>
               <a:spcAft>
-                <a:spcPts val="600"/>
+                <a:spcPts val="500"/>
               </a:spcAft>
-              <a:defRPr sz="2000">
-                <a:solidFill>
-                  <a:srgbClr val="222222"/>
-                </a:solidFill>
-                <a:latin typeface="Calibri"/>
-              </a:defRPr>
-            </a:pPr>
+              <a:defRPr sz="1700">
+                <a:solidFill>
+                  <a:srgbClr val="333333"/>
+                </a:solidFill>
+                <a:latin typeface="Inter"/>
+              </a:defRPr>
+            </a:pPr>
+            <a:r>
+              <a:t>Run 3: A=low,  B=high  → 68%</a:t>
+            </a:r>
           </a:p>
           <a:p>
             <a:pPr>
               <a:spcAft>
-                <a:spcPts val="600"/>
+                <a:spcPts val="500"/>
               </a:spcAft>
-              <a:defRPr sz="2000">
-                <a:solidFill>
-                  <a:srgbClr val="222222"/>
-                </a:solidFill>
-                <a:latin typeface="Calibri"/>
-              </a:defRPr>
-            </a:pPr>
-            <a:r>
-              <a:t>Interaction AB = [(62+91)-(74+68)]/2</a:t>
-            </a:r>
-          </a:p>
+              <a:defRPr sz="1700">
+                <a:solidFill>
+                  <a:srgbClr val="333333"/>
+                </a:solidFill>
+                <a:latin typeface="Inter"/>
+              </a:defRPr>
+            </a:pPr>
+            <a:r>
+              <a:t>Run 4: A=high, B=high  → 91%</a:t>
+            </a:r>
+          </a:p>
+        </p:txBody>
+      </p:sp>
+      <p:sp>
+        <p:nvSpPr>
+          <p:cNvPr id="9" name="Rounded Rectangle 8"/>
+          <p:cNvSpPr/>
+          <p:nvPr/>
+        </p:nvSpPr>
+        <p:spPr>
+          <a:xfrm>
+            <a:off x="6217920" y="1188720"/>
+            <a:ext cx="5303520" cy="4937760"/>
+          </a:xfrm>
+          <a:prstGeom prst="roundRect">
+            <a:avLst/>
+          </a:prstGeom>
+          <a:solidFill>
+            <a:srgbClr val="EEF2FF"/>
+          </a:solidFill>
+          <a:ln>
+            <a:noFill/>
+          </a:ln>
+        </p:spPr>
+        <p:style>
+          <a:lnRef idx="1">
+            <a:schemeClr val="accent1"/>
+          </a:lnRef>
+          <a:fillRef idx="3">
+            <a:schemeClr val="accent1"/>
+          </a:fillRef>
+          <a:effectRef idx="2">
+            <a:schemeClr val="accent1"/>
+          </a:effectRef>
+          <a:fontRef idx="minor">
+            <a:schemeClr val="lt1"/>
+          </a:fontRef>
+        </p:style>
+        <p:txBody>
+          <a:bodyPr rtlCol="0" anchor="ctr"/>
+          <a:lstStyle/>
+          <a:p>
+            <a:pPr algn="ctr"/>
+          </a:p>
+        </p:txBody>
+      </p:sp>
+      <p:sp>
+        <p:nvSpPr>
+          <p:cNvPr id="10" name="Rectangle 9"/>
+          <p:cNvSpPr/>
+          <p:nvPr/>
+        </p:nvSpPr>
+        <p:spPr>
+          <a:xfrm>
+            <a:off x="6217920" y="1188720"/>
+            <a:ext cx="36576" cy="4937760"/>
+          </a:xfrm>
+          <a:prstGeom prst="rect">
+            <a:avLst/>
+          </a:prstGeom>
+          <a:solidFill>
+            <a:srgbClr val="5046E5"/>
+          </a:solidFill>
+          <a:ln>
+            <a:noFill/>
+          </a:ln>
+        </p:spPr>
+        <p:style>
+          <a:lnRef idx="1">
+            <a:schemeClr val="accent1"/>
+          </a:lnRef>
+          <a:fillRef idx="3">
+            <a:schemeClr val="accent1"/>
+          </a:fillRef>
+          <a:effectRef idx="2">
+            <a:schemeClr val="accent1"/>
+          </a:effectRef>
+          <a:fontRef idx="minor">
+            <a:schemeClr val="lt1"/>
+          </a:fontRef>
+        </p:style>
+        <p:txBody>
+          <a:bodyPr rtlCol="0" anchor="ctr"/>
+          <a:lstStyle/>
+          <a:p>
+            <a:pPr algn="ctr"/>
+          </a:p>
+        </p:txBody>
+      </p:sp>
+      <p:sp>
+        <p:nvSpPr>
+          <p:cNvPr id="11" name="TextBox 10"/>
+          <p:cNvSpPr txBox="1"/>
+          <p:nvPr/>
+        </p:nvSpPr>
+        <p:spPr>
+          <a:xfrm>
+            <a:off x="6492240" y="1325880"/>
+            <a:ext cx="4754880" cy="365760"/>
+          </a:xfrm>
+          <a:prstGeom prst="rect">
+            <a:avLst/>
+          </a:prstGeom>
+          <a:noFill/>
+        </p:spPr>
+        <p:txBody>
+          <a:bodyPr wrap="square">
+            <a:spAutoFit/>
+          </a:bodyPr>
+          <a:lstStyle/>
+          <a:p>
+            <a:pPr algn="l">
+              <a:defRPr sz="1600" b="1">
+                <a:solidFill>
+                  <a:srgbClr val="5046E5"/>
+                </a:solidFill>
+                <a:latin typeface="Consolas"/>
+              </a:defRPr>
+            </a:pPr>
+            <a:r>
+              <a:t>EFFECT CALCULATIONS</a:t>
+            </a:r>
+          </a:p>
+        </p:txBody>
+      </p:sp>
+      <p:sp>
+        <p:nvSpPr>
+          <p:cNvPr id="12" name="TextBox 11"/>
+          <p:cNvSpPr txBox="1"/>
+          <p:nvPr/>
+        </p:nvSpPr>
+        <p:spPr>
+          <a:xfrm>
+            <a:off x="6492240" y="1737360"/>
+            <a:ext cx="4754880" cy="4114800"/>
+          </a:xfrm>
+          <a:prstGeom prst="rect">
+            <a:avLst/>
+          </a:prstGeom>
+          <a:noFill/>
+        </p:spPr>
+        <p:txBody>
+          <a:bodyPr wrap="square">
+            <a:spAutoFit/>
+          </a:bodyPr>
+          <a:lstStyle/>
           <a:p>
             <a:pPr>
               <a:spcAft>
-                <a:spcPts val="600"/>
+                <a:spcPts val="500"/>
               </a:spcAft>
-              <a:defRPr sz="2000">
-                <a:solidFill>
-                  <a:srgbClr val="222222"/>
-                </a:solidFill>
-                <a:latin typeface="Calibri"/>
-              </a:defRPr>
-            </a:pPr>
-            <a:r>
-              <a:t>  = 5.5% (Synergy!)</a:t>
+              <a:defRPr sz="1700">
+                <a:solidFill>
+                  <a:srgbClr val="333333"/>
+                </a:solidFill>
+                <a:latin typeface="Inter"/>
+              </a:defRPr>
+            </a:pPr>
+            <a:r>
+              <a:t>Main effect A:</a:t>
+            </a:r>
+          </a:p>
+          <a:p>
+            <a:pPr>
+              <a:spcAft>
+                <a:spcPts val="500"/>
+              </a:spcAft>
+              <a:defRPr sz="1700">
+                <a:solidFill>
+                  <a:srgbClr val="333333"/>
+                </a:solidFill>
+                <a:latin typeface="Inter"/>
+              </a:defRPr>
+            </a:pPr>
+            <a:r>
+              <a:t>  [(74+91)−(62+68)] / 2 = 17.5%</a:t>
+            </a:r>
+          </a:p>
+          <a:p>
+            <a:pPr>
+              <a:spcAft>
+                <a:spcPts val="500"/>
+              </a:spcAft>
+              <a:defRPr sz="1700">
+                <a:solidFill>
+                  <a:srgbClr val="333333"/>
+                </a:solidFill>
+                <a:latin typeface="Inter"/>
+              </a:defRPr>
+            </a:pPr>
+          </a:p>
+          <a:p>
+            <a:pPr>
+              <a:spcAft>
+                <a:spcPts val="500"/>
+              </a:spcAft>
+              <a:defRPr sz="1700">
+                <a:solidFill>
+                  <a:srgbClr val="333333"/>
+                </a:solidFill>
+                <a:latin typeface="Inter"/>
+              </a:defRPr>
+            </a:pPr>
+            <a:r>
+              <a:t>Main effect B:</a:t>
+            </a:r>
+          </a:p>
+          <a:p>
+            <a:pPr>
+              <a:spcAft>
+                <a:spcPts val="500"/>
+              </a:spcAft>
+              <a:defRPr sz="1700">
+                <a:solidFill>
+                  <a:srgbClr val="333333"/>
+                </a:solidFill>
+                <a:latin typeface="Inter"/>
+              </a:defRPr>
+            </a:pPr>
+            <a:r>
+              <a:t>  [(68+91)−(62+74)] / 2 = 11.5%</a:t>
+            </a:r>
+          </a:p>
+          <a:p>
+            <a:pPr>
+              <a:spcAft>
+                <a:spcPts val="500"/>
+              </a:spcAft>
+              <a:defRPr sz="1700">
+                <a:solidFill>
+                  <a:srgbClr val="333333"/>
+                </a:solidFill>
+                <a:latin typeface="Inter"/>
+              </a:defRPr>
+            </a:pPr>
+          </a:p>
+          <a:p>
+            <a:pPr>
+              <a:spcAft>
+                <a:spcPts val="500"/>
+              </a:spcAft>
+              <a:defRPr sz="1700">
+                <a:solidFill>
+                  <a:srgbClr val="333333"/>
+                </a:solidFill>
+                <a:latin typeface="Inter"/>
+              </a:defRPr>
+            </a:pPr>
+            <a:r>
+              <a:t>Interaction AB:</a:t>
+            </a:r>
+          </a:p>
+          <a:p>
+            <a:pPr>
+              <a:spcAft>
+                <a:spcPts val="500"/>
+              </a:spcAft>
+              <a:defRPr sz="1700">
+                <a:solidFill>
+                  <a:srgbClr val="333333"/>
+                </a:solidFill>
+                <a:latin typeface="Inter"/>
+              </a:defRPr>
+            </a:pPr>
+            <a:r>
+              <a:t>  [(62+91)−(74+68)] / 2 = 5.5%</a:t>
+            </a:r>
+          </a:p>
+        </p:txBody>
+      </p:sp>
+      <p:sp>
+        <p:nvSpPr>
+          <p:cNvPr id="13" name="TextBox 12"/>
+          <p:cNvSpPr txBox="1"/>
+          <p:nvPr/>
+        </p:nvSpPr>
+        <p:spPr>
+          <a:xfrm>
+            <a:off x="731520" y="6400800"/>
+            <a:ext cx="10058400" cy="365760"/>
+          </a:xfrm>
+          <a:prstGeom prst="rect">
+            <a:avLst/>
+          </a:prstGeom>
+          <a:noFill/>
+        </p:spPr>
+        <p:txBody>
+          <a:bodyPr wrap="square">
+            <a:spAutoFit/>
+          </a:bodyPr>
+          <a:lstStyle/>
+          <a:p>
+            <a:pPr algn="l">
+              <a:defRPr sz="1000" b="0">
+                <a:solidFill>
+                  <a:srgbClr val="999999"/>
+                </a:solidFill>
+                <a:latin typeface="Consolas"/>
+              </a:defRPr>
+            </a:pPr>
+            <a:r>
+              <a:t>© 2026 Martin J. Gallagher  |  GPL-3.0-or-later  |  doehelper.com</a:t>
             </a:r>
           </a:p>
         </p:txBody>
@@ -4941,7 +5334,7 @@
     <p:bg>
       <p:bgPr>
         <a:solidFill>
-          <a:srgbClr val="FFFFFF"/>
+          <a:srgbClr val="FAFAFA"/>
         </a:solidFill>
         <a:effectLst/>
       </p:bgPr>
@@ -4962,13 +5355,13 @@
         <p:spPr>
           <a:xfrm>
             <a:off x="0" y="0"/>
-            <a:ext cx="12191695" cy="54864"/>
+            <a:ext cx="12191695" cy="45720"/>
           </a:xfrm>
           <a:prstGeom prst="rect">
             <a:avLst/>
           </a:prstGeom>
           <a:solidFill>
-            <a:srgbClr val="007BFF"/>
+            <a:srgbClr val="5046E5"/>
           </a:solidFill>
           <a:ln>
             <a:noFill/>
@@ -4998,14 +5391,57 @@
       </p:sp>
       <p:sp>
         <p:nvSpPr>
-          <p:cNvPr id="3" name="TextBox 2"/>
+          <p:cNvPr id="3" name="Rectangle 2"/>
+          <p:cNvSpPr/>
+          <p:nvPr/>
+        </p:nvSpPr>
+        <p:spPr>
+          <a:xfrm>
+            <a:off x="548640" y="411480"/>
+            <a:ext cx="36576" cy="502920"/>
+          </a:xfrm>
+          <a:prstGeom prst="rect">
+            <a:avLst/>
+          </a:prstGeom>
+          <a:solidFill>
+            <a:srgbClr val="5046E5"/>
+          </a:solidFill>
+          <a:ln>
+            <a:noFill/>
+          </a:ln>
+        </p:spPr>
+        <p:style>
+          <a:lnRef idx="1">
+            <a:schemeClr val="accent1"/>
+          </a:lnRef>
+          <a:fillRef idx="3">
+            <a:schemeClr val="accent1"/>
+          </a:fillRef>
+          <a:effectRef idx="2">
+            <a:schemeClr val="accent1"/>
+          </a:effectRef>
+          <a:fontRef idx="minor">
+            <a:schemeClr val="lt1"/>
+          </a:fontRef>
+        </p:style>
+        <p:txBody>
+          <a:bodyPr rtlCol="0" anchor="ctr"/>
+          <a:lstStyle/>
+          <a:p>
+            <a:pPr algn="ctr"/>
+          </a:p>
+        </p:txBody>
+      </p:sp>
+      <p:sp>
+        <p:nvSpPr>
+          <p:cNvPr id="4" name="TextBox 3"/>
           <p:cNvSpPr txBox="1"/>
           <p:nvPr/>
         </p:nvSpPr>
         <p:spPr>
           <a:xfrm>
-            <a:off x="731520" y="365760"/>
-            <a:ext cx="10515600" cy="822960"/>
+            <a:off x="777240" y="365760"/>
+            <a:ext cx="10058400" cy="640080"/>
           </a:xfrm>
           <a:prstGeom prst="rect">
             <a:avLst/>
@@ -5018,12 +5454,12 @@
           </a:bodyPr>
           <a:lstStyle/>
           <a:p>
-            <a:pPr>
-              <a:defRPr sz="3200" b="1">
-                <a:solidFill>
-                  <a:srgbClr val="222222"/>
-                </a:solidFill>
-                <a:latin typeface="Calibri"/>
+            <a:pPr algn="l">
+              <a:defRPr sz="2800" b="1">
+                <a:solidFill>
+                  <a:srgbClr val="111111"/>
+                </a:solidFill>
+                <a:latin typeface="Inter"/>
               </a:defRPr>
             </a:pPr>
             <a:r>
@@ -5034,14 +5470,14 @@
       </p:sp>
       <p:sp>
         <p:nvSpPr>
-          <p:cNvPr id="4" name="TextBox 3"/>
+          <p:cNvPr id="5" name="TextBox 4"/>
           <p:cNvSpPr txBox="1"/>
           <p:nvPr/>
         </p:nvSpPr>
         <p:spPr>
           <a:xfrm>
-            <a:off x="914400" y="1463040"/>
-            <a:ext cx="10058400" cy="4754880"/>
+            <a:off x="822960" y="1188720"/>
+            <a:ext cx="10241280" cy="5120640"/>
           </a:xfrm>
           <a:prstGeom prst="rect">
             <a:avLst/>
@@ -5056,13 +5492,13 @@
           <a:p>
             <a:pPr>
               <a:spcAft>
-                <a:spcPts val="800"/>
+                <a:spcPts val="600"/>
               </a:spcAft>
-              <a:defRPr sz="2200" b="0">
-                <a:solidFill>
-                  <a:srgbClr val="222222"/>
-                </a:solidFill>
-                <a:latin typeface="Calibri"/>
+              <a:defRPr sz="1900">
+                <a:solidFill>
+                  <a:srgbClr val="333333"/>
+                </a:solidFill>
+                <a:latin typeface="Inter"/>
               </a:defRPr>
             </a:pPr>
             <a:r>
@@ -5072,13 +5508,13 @@
           <a:p>
             <a:pPr>
               <a:spcAft>
-                <a:spcPts val="800"/>
+                <a:spcPts val="600"/>
               </a:spcAft>
-              <a:defRPr sz="2200" b="0">
-                <a:solidFill>
-                  <a:srgbClr val="222222"/>
-                </a:solidFill>
-                <a:latin typeface="Calibri"/>
+              <a:defRPr sz="1900">
+                <a:solidFill>
+                  <a:srgbClr val="333333"/>
+                </a:solidFill>
+                <a:latin typeface="Inter"/>
               </a:defRPr>
             </a:pPr>
             <a:r>
@@ -5088,13 +5524,13 @@
           <a:p>
             <a:pPr>
               <a:spcAft>
-                <a:spcPts val="800"/>
+                <a:spcPts val="600"/>
               </a:spcAft>
-              <a:defRPr sz="2200" b="0">
-                <a:solidFill>
-                  <a:srgbClr val="222222"/>
-                </a:solidFill>
-                <a:latin typeface="Calibri"/>
+              <a:defRPr sz="1900">
+                <a:solidFill>
+                  <a:srgbClr val="333333"/>
+                </a:solidFill>
+                <a:latin typeface="Inter"/>
               </a:defRPr>
             </a:pPr>
             <a:r>
@@ -5104,65 +5540,101 @@
           <a:p>
             <a:pPr lvl="1">
               <a:spcAft>
-                <a:spcPts val="800"/>
+                <a:spcPts val="600"/>
+              </a:spcAft>
+              <a:defRPr sz="1700">
+                <a:solidFill>
+                  <a:srgbClr val="666666"/>
+                </a:solidFill>
+                <a:latin typeface="Inter"/>
+              </a:defRPr>
+            </a:pPr>
+            <a:r>
+              <a:t>But at high pressure, the temperature boost is even larger</a:t>
+            </a:r>
+          </a:p>
+          <a:p>
+            <a:pPr lvl="1">
+              <a:spcAft>
+                <a:spcPts val="600"/>
+              </a:spcAft>
+              <a:defRPr sz="1700">
+                <a:solidFill>
+                  <a:srgbClr val="666666"/>
+                </a:solidFill>
+                <a:latin typeface="Inter"/>
+              </a:defRPr>
+            </a:pPr>
+            <a:r>
+              <a:t>The combination is more powerful than either alone</a:t>
+            </a:r>
+          </a:p>
+          <a:p>
+            <a:pPr>
+              <a:spcAft>
+                <a:spcPts val="600"/>
               </a:spcAft>
               <a:defRPr sz="1900">
                 <a:solidFill>
-                  <a:srgbClr val="222222"/>
-                </a:solidFill>
-                <a:latin typeface="Calibri"/>
-              </a:defRPr>
-            </a:pPr>
-            <a:r>
-              <a:t>But at high pressure, temperature boost is even larger</a:t>
-            </a:r>
-          </a:p>
-          <a:p>
-            <a:pPr lvl="1">
+                  <a:srgbClr val="333333"/>
+                </a:solidFill>
+                <a:latin typeface="Inter"/>
+              </a:defRPr>
+            </a:pPr>
+            <a:r>
+              <a:t>Interactions can be antagonistic too (cancel each other out)</a:t>
+            </a:r>
+          </a:p>
+          <a:p>
+            <a:pPr>
               <a:spcAft>
-                <a:spcPts val="800"/>
+                <a:spcPts val="600"/>
               </a:spcAft>
               <a:defRPr sz="1900">
                 <a:solidFill>
-                  <a:srgbClr val="222222"/>
-                </a:solidFill>
-                <a:latin typeface="Calibri"/>
-              </a:defRPr>
-            </a:pPr>
-            <a:r>
-              <a:t>The combination is more powerful than either alone</a:t>
-            </a:r>
-          </a:p>
-          <a:p>
-            <a:pPr>
-              <a:spcAft>
-                <a:spcPts val="800"/>
-              </a:spcAft>
-              <a:defRPr sz="2200" b="0">
-                <a:solidFill>
-                  <a:srgbClr val="222222"/>
-                </a:solidFill>
-                <a:latin typeface="Calibri"/>
-              </a:defRPr>
-            </a:pPr>
-            <a:r>
-              <a:t>Interactions can be antagonistic too (cancel each other out)</a:t>
-            </a:r>
-          </a:p>
-          <a:p>
-            <a:pPr>
-              <a:spcAft>
-                <a:spcPts val="800"/>
-              </a:spcAft>
-              <a:defRPr sz="2200" b="0">
-                <a:solidFill>
-                  <a:srgbClr val="222222"/>
-                </a:solidFill>
-                <a:latin typeface="Calibri"/>
+                  <a:srgbClr val="333333"/>
+                </a:solidFill>
+                <a:latin typeface="Inter"/>
               </a:defRPr>
             </a:pPr>
             <a:r>
               <a:t>Full factorials capture all of these relationships</a:t>
+            </a:r>
+          </a:p>
+        </p:txBody>
+      </p:sp>
+      <p:sp>
+        <p:nvSpPr>
+          <p:cNvPr id="6" name="TextBox 5"/>
+          <p:cNvSpPr txBox="1"/>
+          <p:nvPr/>
+        </p:nvSpPr>
+        <p:spPr>
+          <a:xfrm>
+            <a:off x="731520" y="6400800"/>
+            <a:ext cx="10058400" cy="365760"/>
+          </a:xfrm>
+          <a:prstGeom prst="rect">
+            <a:avLst/>
+          </a:prstGeom>
+          <a:noFill/>
+        </p:spPr>
+        <p:txBody>
+          <a:bodyPr wrap="square">
+            <a:spAutoFit/>
+          </a:bodyPr>
+          <a:lstStyle/>
+          <a:p>
+            <a:pPr algn="l">
+              <a:defRPr sz="1000" b="0">
+                <a:solidFill>
+                  <a:srgbClr val="999999"/>
+                </a:solidFill>
+                <a:latin typeface="Consolas"/>
+              </a:defRPr>
+            </a:pPr>
+            <a:r>
+              <a:t>© 2026 Martin J. Gallagher  |  GPL-3.0-or-later  |  doehelper.com</a:t>
             </a:r>
           </a:p>
         </p:txBody>
@@ -5181,7 +5653,7 @@
     <p:bg>
       <p:bgPr>
         <a:solidFill>
-          <a:srgbClr val="FFFFFF"/>
+          <a:srgbClr val="FAFAFA"/>
         </a:solidFill>
         <a:effectLst/>
       </p:bgPr>
@@ -5202,13 +5674,13 @@
         <p:spPr>
           <a:xfrm>
             <a:off x="0" y="0"/>
-            <a:ext cx="12191695" cy="54864"/>
+            <a:ext cx="12191695" cy="45720"/>
           </a:xfrm>
           <a:prstGeom prst="rect">
             <a:avLst/>
           </a:prstGeom>
           <a:solidFill>
-            <a:srgbClr val="00C853"/>
+            <a:srgbClr val="0D9488"/>
           </a:solidFill>
           <a:ln>
             <a:noFill/>
@@ -5244,8 +5716,8 @@
         </p:nvSpPr>
         <p:spPr>
           <a:xfrm>
-            <a:off x="731520" y="365760"/>
-            <a:ext cx="10515600" cy="822960"/>
+            <a:off x="777240" y="320040"/>
+            <a:ext cx="10058400" cy="548640"/>
           </a:xfrm>
           <a:prstGeom prst="rect">
             <a:avLst/>
@@ -5258,12 +5730,12 @@
           </a:bodyPr>
           <a:lstStyle/>
           <a:p>
-            <a:pPr>
-              <a:defRPr sz="3000" b="1">
-                <a:solidFill>
-                  <a:srgbClr val="222222"/>
-                </a:solidFill>
-                <a:latin typeface="Calibri"/>
+            <a:pPr algn="l">
+              <a:defRPr sz="2600" b="1">
+                <a:solidFill>
+                  <a:srgbClr val="111111"/>
+                </a:solidFill>
+                <a:latin typeface="Inter"/>
               </a:defRPr>
             </a:pPr>
             <a:r>
@@ -5274,20 +5746,20 @@
       </p:sp>
       <p:sp>
         <p:nvSpPr>
-          <p:cNvPr id="4" name="Rounded Rectangle 3"/>
+          <p:cNvPr id="4" name="Rectangle 3"/>
           <p:cNvSpPr/>
           <p:nvPr/>
         </p:nvSpPr>
         <p:spPr>
           <a:xfrm>
-            <a:off x="731520" y="1371600"/>
-            <a:ext cx="10515600" cy="4114800"/>
-          </a:xfrm>
-          <a:prstGeom prst="roundRect">
+            <a:off x="548640" y="1051560"/>
+            <a:ext cx="10972800" cy="320040"/>
+          </a:xfrm>
+          <a:prstGeom prst="rect">
             <a:avLst/>
           </a:prstGeom>
           <a:solidFill>
-            <a:srgbClr val="2D2D2D"/>
+            <a:srgbClr val="222222"/>
           </a:solidFill>
           <a:ln>
             <a:noFill/>
@@ -5308,16 +5780,95 @@
           </a:fontRef>
         </p:style>
         <p:txBody>
-          <a:bodyPr rtlCol="0" anchor="ctr" wrap="square" lIns="274320" tIns="274320"/>
+          <a:bodyPr rtlCol="0" anchor="ctr"/>
+          <a:lstStyle/>
+          <a:p>
+            <a:pPr algn="ctr"/>
+          </a:p>
+        </p:txBody>
+      </p:sp>
+      <p:sp>
+        <p:nvSpPr>
+          <p:cNvPr id="5" name="TextBox 4"/>
+          <p:cNvSpPr txBox="1"/>
+          <p:nvPr/>
+        </p:nvSpPr>
+        <p:spPr>
+          <a:xfrm>
+            <a:off x="822960" y="1051560"/>
+            <a:ext cx="3657600" cy="320040"/>
+          </a:xfrm>
+          <a:prstGeom prst="rect">
+            <a:avLst/>
+          </a:prstGeom>
+          <a:noFill/>
+        </p:spPr>
+        <p:txBody>
+          <a:bodyPr wrap="square" anchor="ctr">
+            <a:spAutoFit/>
+          </a:bodyPr>
+          <a:lstStyle/>
+          <a:p>
+            <a:pPr algn="l">
+              <a:defRPr sz="1000" b="0">
+                <a:solidFill>
+                  <a:srgbClr val="999999"/>
+                </a:solidFill>
+                <a:latin typeface="Consolas"/>
+              </a:defRPr>
+            </a:pPr>
+            <a:r>
+              <a:t>terminal</a:t>
+            </a:r>
+          </a:p>
+        </p:txBody>
+      </p:sp>
+      <p:sp>
+        <p:nvSpPr>
+          <p:cNvPr id="6" name="Rounded Rectangle 5"/>
+          <p:cNvSpPr/>
+          <p:nvPr/>
+        </p:nvSpPr>
+        <p:spPr>
+          <a:xfrm>
+            <a:off x="548640" y="1371600"/>
+            <a:ext cx="10972800" cy="4389120"/>
+          </a:xfrm>
+          <a:prstGeom prst="roundRect">
+            <a:avLst/>
+          </a:prstGeom>
+          <a:solidFill>
+            <a:srgbClr val="1A1A1A"/>
+          </a:solidFill>
+          <a:ln>
+            <a:noFill/>
+          </a:ln>
+        </p:spPr>
+        <p:style>
+          <a:lnRef idx="1">
+            <a:schemeClr val="accent1"/>
+          </a:lnRef>
+          <a:fillRef idx="3">
+            <a:schemeClr val="accent1"/>
+          </a:fillRef>
+          <a:effectRef idx="2">
+            <a:schemeClr val="accent1"/>
+          </a:effectRef>
+          <a:fontRef idx="minor">
+            <a:schemeClr val="lt1"/>
+          </a:fontRef>
+        </p:style>
+        <p:txBody>
+          <a:bodyPr rtlCol="0" anchor="ctr" wrap="square" lIns="274320" tIns="182880" rIns="274320"/>
           <a:lstStyle/>
           <a:p>
             <a:pPr algn="ctr">
               <a:spcAft>
-                <a:spcPts val="200"/>
+                <a:spcPts val="100"/>
               </a:spcAft>
-              <a:defRPr sz="1800">
-                <a:solidFill>
-                  <a:srgbClr val="D4D4D4"/>
+              <a:defRPr sz="1500">
+                <a:solidFill>
+                  <a:srgbClr val="555555"/>
                 </a:solidFill>
                 <a:latin typeface="Consolas"/>
               </a:defRPr>
@@ -5329,11 +5880,11 @@
           <a:p>
             <a:pPr>
               <a:spcAft>
-                <a:spcPts val="200"/>
+                <a:spcPts val="100"/>
               </a:spcAft>
-              <a:defRPr sz="1800">
-                <a:solidFill>
-                  <a:srgbClr val="D4D4D4"/>
+              <a:defRPr sz="1500">
+                <a:solidFill>
+                  <a:srgbClr val="6EC86E"/>
                 </a:solidFill>
                 <a:latin typeface="Consolas"/>
               </a:defRPr>
@@ -5345,11 +5896,11 @@
           <a:p>
             <a:pPr>
               <a:spcAft>
-                <a:spcPts val="200"/>
+                <a:spcPts val="100"/>
               </a:spcAft>
-              <a:defRPr sz="1800">
-                <a:solidFill>
-                  <a:srgbClr val="D4D4D4"/>
+              <a:defRPr sz="1500">
+                <a:solidFill>
+                  <a:srgbClr val="CCCCCC"/>
                 </a:solidFill>
                 <a:latin typeface="Consolas"/>
               </a:defRPr>
@@ -5361,11 +5912,11 @@
           <a:p>
             <a:pPr>
               <a:spcAft>
-                <a:spcPts val="200"/>
+                <a:spcPts val="100"/>
               </a:spcAft>
-              <a:defRPr sz="1800">
-                <a:solidFill>
-                  <a:srgbClr val="D4D4D4"/>
+              <a:defRPr sz="1500">
+                <a:solidFill>
+                  <a:srgbClr val="CCCCCC"/>
                 </a:solidFill>
                 <a:latin typeface="Consolas"/>
               </a:defRPr>
@@ -5377,11 +5928,11 @@
           <a:p>
             <a:pPr>
               <a:spcAft>
-                <a:spcPts val="200"/>
+                <a:spcPts val="100"/>
               </a:spcAft>
-              <a:defRPr sz="1800">
-                <a:solidFill>
-                  <a:srgbClr val="D4D4D4"/>
+              <a:defRPr sz="1500">
+                <a:solidFill>
+                  <a:srgbClr val="CCCCCC"/>
                 </a:solidFill>
                 <a:latin typeface="Consolas"/>
               </a:defRPr>
@@ -5393,11 +5944,11 @@
           <a:p>
             <a:pPr>
               <a:spcAft>
-                <a:spcPts val="200"/>
+                <a:spcPts val="100"/>
               </a:spcAft>
-              <a:defRPr sz="1800">
-                <a:solidFill>
-                  <a:srgbClr val="D4D4D4"/>
+              <a:defRPr sz="1500">
+                <a:solidFill>
+                  <a:srgbClr val="CCCCCC"/>
                 </a:solidFill>
                 <a:latin typeface="Consolas"/>
               </a:defRPr>
@@ -5409,11 +5960,11 @@
           <a:p>
             <a:pPr>
               <a:spcAft>
-                <a:spcPts val="200"/>
+                <a:spcPts val="100"/>
               </a:spcAft>
-              <a:defRPr sz="1800">
-                <a:solidFill>
-                  <a:srgbClr val="D4D4D4"/>
+              <a:defRPr sz="1500">
+                <a:solidFill>
+                  <a:srgbClr val="CCCCCC"/>
                 </a:solidFill>
                 <a:latin typeface="Consolas"/>
               </a:defRPr>
@@ -5425,11 +5976,11 @@
           <a:p>
             <a:pPr>
               <a:spcAft>
-                <a:spcPts val="200"/>
+                <a:spcPts val="100"/>
               </a:spcAft>
-              <a:defRPr sz="1800">
-                <a:solidFill>
-                  <a:srgbClr val="D4D4D4"/>
+              <a:defRPr sz="1500">
+                <a:solidFill>
+                  <a:srgbClr val="CCCCCC"/>
                 </a:solidFill>
                 <a:latin typeface="Consolas"/>
               </a:defRPr>
@@ -5441,11 +5992,11 @@
           <a:p>
             <a:pPr>
               <a:spcAft>
-                <a:spcPts val="200"/>
+                <a:spcPts val="100"/>
               </a:spcAft>
-              <a:defRPr sz="1800">
-                <a:solidFill>
-                  <a:srgbClr val="D4D4D4"/>
+              <a:defRPr sz="1500">
+                <a:solidFill>
+                  <a:srgbClr val="CCCCCC"/>
                 </a:solidFill>
                 <a:latin typeface="Consolas"/>
               </a:defRPr>
@@ -5457,11 +6008,11 @@
           <a:p>
             <a:pPr>
               <a:spcAft>
-                <a:spcPts val="200"/>
+                <a:spcPts val="100"/>
               </a:spcAft>
-              <a:defRPr sz="1800">
-                <a:solidFill>
-                  <a:srgbClr val="D4D4D4"/>
+              <a:defRPr sz="1500">
+                <a:solidFill>
+                  <a:srgbClr val="CCCCCC"/>
                 </a:solidFill>
                 <a:latin typeface="Consolas"/>
               </a:defRPr>
@@ -5473,11 +6024,11 @@
           <a:p>
             <a:pPr>
               <a:spcAft>
-                <a:spcPts val="200"/>
+                <a:spcPts val="100"/>
               </a:spcAft>
-              <a:defRPr sz="1800">
-                <a:solidFill>
-                  <a:srgbClr val="D4D4D4"/>
+              <a:defRPr sz="1500">
+                <a:solidFill>
+                  <a:srgbClr val="CCCCCC"/>
                 </a:solidFill>
                 <a:latin typeface="Consolas"/>
               </a:defRPr>
@@ -5489,11 +6040,11 @@
           <a:p>
             <a:pPr>
               <a:spcAft>
-                <a:spcPts val="200"/>
+                <a:spcPts val="100"/>
               </a:spcAft>
-              <a:defRPr sz="1800">
-                <a:solidFill>
-                  <a:srgbClr val="D4D4D4"/>
+              <a:defRPr sz="1500">
+                <a:solidFill>
+                  <a:srgbClr val="CCCCCC"/>
                 </a:solidFill>
                 <a:latin typeface="Consolas"/>
               </a:defRPr>
@@ -5505,11 +6056,11 @@
           <a:p>
             <a:pPr>
               <a:spcAft>
-                <a:spcPts val="200"/>
+                <a:spcPts val="100"/>
               </a:spcAft>
-              <a:defRPr sz="1800">
-                <a:solidFill>
-                  <a:srgbClr val="D4D4D4"/>
+              <a:defRPr sz="1500">
+                <a:solidFill>
+                  <a:srgbClr val="CCCCCC"/>
                 </a:solidFill>
                 <a:latin typeface="Consolas"/>
               </a:defRPr>
@@ -5521,11 +6072,11 @@
           <a:p>
             <a:pPr>
               <a:spcAft>
-                <a:spcPts val="200"/>
+                <a:spcPts val="100"/>
               </a:spcAft>
-              <a:defRPr sz="1800">
-                <a:solidFill>
-                  <a:srgbClr val="D4D4D4"/>
+              <a:defRPr sz="1500">
+                <a:solidFill>
+                  <a:srgbClr val="CCCCCC"/>
                 </a:solidFill>
                 <a:latin typeface="Consolas"/>
               </a:defRPr>
@@ -5537,11 +6088,11 @@
           <a:p>
             <a:pPr>
               <a:spcAft>
-                <a:spcPts val="200"/>
+                <a:spcPts val="100"/>
               </a:spcAft>
-              <a:defRPr sz="1800">
-                <a:solidFill>
-                  <a:srgbClr val="D4D4D4"/>
+              <a:defRPr sz="1500">
+                <a:solidFill>
+                  <a:srgbClr val="CCCCCC"/>
                 </a:solidFill>
                 <a:latin typeface="Consolas"/>
               </a:defRPr>
@@ -5550,27 +6101,27 @@
           <a:p>
             <a:pPr>
               <a:spcAft>
-                <a:spcPts val="200"/>
+                <a:spcPts val="100"/>
               </a:spcAft>
-              <a:defRPr sz="1800">
-                <a:solidFill>
-                  <a:srgbClr val="D4D4D4"/>
+              <a:defRPr sz="1500">
+                <a:solidFill>
+                  <a:srgbClr val="555555"/>
                 </a:solidFill>
                 <a:latin typeface="Consolas"/>
               </a:defRPr>
             </a:pPr>
             <a:r>
-              <a:t># 2. Generate the design matrix</a:t>
+              <a:t># 2. Generate, run, analyse</a:t>
             </a:r>
           </a:p>
           <a:p>
             <a:pPr>
               <a:spcAft>
-                <a:spcPts val="200"/>
+                <a:spcPts val="100"/>
               </a:spcAft>
-              <a:defRPr sz="1800">
-                <a:solidFill>
-                  <a:srgbClr val="D4D4D4"/>
+              <a:defRPr sz="1500">
+                <a:solidFill>
+                  <a:srgbClr val="6EC86E"/>
                 </a:solidFill>
                 <a:latin typeface="Consolas"/>
               </a:defRPr>
@@ -5582,91 +6133,69 @@
           <a:p>
             <a:pPr>
               <a:spcAft>
-                <a:spcPts val="200"/>
+                <a:spcPts val="100"/>
               </a:spcAft>
-              <a:defRPr sz="1800">
-                <a:solidFill>
-                  <a:srgbClr val="D4D4D4"/>
+              <a:defRPr sz="1500">
+                <a:solidFill>
+                  <a:srgbClr val="6EC86E"/>
                 </a:solidFill>
                 <a:latin typeface="Consolas"/>
               </a:defRPr>
             </a:pPr>
+            <a:r>
+              <a:t>$ doe record seal_strength/</a:t>
+            </a:r>
           </a:p>
           <a:p>
             <a:pPr>
               <a:spcAft>
-                <a:spcPts val="200"/>
+                <a:spcPts val="100"/>
               </a:spcAft>
-              <a:defRPr sz="1800">
-                <a:solidFill>
-                  <a:srgbClr val="D4D4D4"/>
+              <a:defRPr sz="1500">
+                <a:solidFill>
+                  <a:srgbClr val="6EC86E"/>
                 </a:solidFill>
                 <a:latin typeface="Consolas"/>
               </a:defRPr>
             </a:pPr>
             <a:r>
-              <a:t># 3. Run experiments and record results</a:t>
-            </a:r>
-          </a:p>
-          <a:p>
-            <a:pPr>
-              <a:spcAft>
-                <a:spcPts val="200"/>
-              </a:spcAft>
-              <a:defRPr sz="1800">
-                <a:solidFill>
-                  <a:srgbClr val="D4D4D4"/>
+              <a:t>$ doe analyze seal_strength/</a:t>
+            </a:r>
+          </a:p>
+        </p:txBody>
+      </p:sp>
+      <p:sp>
+        <p:nvSpPr>
+          <p:cNvPr id="7" name="TextBox 6"/>
+          <p:cNvSpPr txBox="1"/>
+          <p:nvPr/>
+        </p:nvSpPr>
+        <p:spPr>
+          <a:xfrm>
+            <a:off x="731520" y="6400800"/>
+            <a:ext cx="10058400" cy="365760"/>
+          </a:xfrm>
+          <a:prstGeom prst="rect">
+            <a:avLst/>
+          </a:prstGeom>
+          <a:noFill/>
+        </p:spPr>
+        <p:txBody>
+          <a:bodyPr wrap="square">
+            <a:spAutoFit/>
+          </a:bodyPr>
+          <a:lstStyle/>
+          <a:p>
+            <a:pPr algn="l">
+              <a:defRPr sz="1000" b="0">
+                <a:solidFill>
+                  <a:srgbClr val="999999"/>
                 </a:solidFill>
                 <a:latin typeface="Consolas"/>
               </a:defRPr>
             </a:pPr>
             <a:r>
-              <a:t>$ doe record seal_strength/</a:t>
-            </a:r>
-          </a:p>
-          <a:p>
-            <a:pPr>
-              <a:spcAft>
-                <a:spcPts val="200"/>
-              </a:spcAft>
-              <a:defRPr sz="1800">
-                <a:solidFill>
-                  <a:srgbClr val="D4D4D4"/>
-                </a:solidFill>
-                <a:latin typeface="Consolas"/>
-              </a:defRPr>
-            </a:pPr>
-          </a:p>
-          <a:p>
-            <a:pPr>
-              <a:spcAft>
-                <a:spcPts val="200"/>
-              </a:spcAft>
-              <a:defRPr sz="1800">
-                <a:solidFill>
-                  <a:srgbClr val="D4D4D4"/>
-                </a:solidFill>
-                <a:latin typeface="Consolas"/>
-              </a:defRPr>
-            </a:pPr>
-            <a:r>
-              <a:t># 4. Analyse</a:t>
-            </a:r>
-          </a:p>
-          <a:p>
-            <a:pPr>
-              <a:spcAft>
-                <a:spcPts val="200"/>
-              </a:spcAft>
-              <a:defRPr sz="1800">
-                <a:solidFill>
-                  <a:srgbClr val="D4D4D4"/>
-                </a:solidFill>
-                <a:latin typeface="Consolas"/>
-              </a:defRPr>
-            </a:pPr>
-            <a:r>
-              <a:t>$ doe analyze seal_strength/</a:t>
+              <a:t>© 2026 Martin J. Gallagher  |  GPL-3.0-or-later  |  doehelper.com</a:t>
             </a:r>
           </a:p>
         </p:txBody>
@@ -5685,7 +6214,7 @@
     <p:bg>
       <p:bgPr>
         <a:solidFill>
-          <a:srgbClr val="FFFFFF"/>
+          <a:srgbClr val="FAFAFA"/>
         </a:solidFill>
         <a:effectLst/>
       </p:bgPr>
@@ -5706,13 +6235,13 @@
         <p:spPr>
           <a:xfrm>
             <a:off x="0" y="0"/>
-            <a:ext cx="12191695" cy="54864"/>
+            <a:ext cx="12191695" cy="45720"/>
           </a:xfrm>
           <a:prstGeom prst="rect">
             <a:avLst/>
           </a:prstGeom>
           <a:solidFill>
-            <a:srgbClr val="007BFF"/>
+            <a:srgbClr val="5046E5"/>
           </a:solidFill>
           <a:ln>
             <a:noFill/>
@@ -5742,14 +6271,57 @@
       </p:sp>
       <p:sp>
         <p:nvSpPr>
-          <p:cNvPr id="3" name="TextBox 2"/>
+          <p:cNvPr id="3" name="Rectangle 2"/>
+          <p:cNvSpPr/>
+          <p:nvPr/>
+        </p:nvSpPr>
+        <p:spPr>
+          <a:xfrm>
+            <a:off x="548640" y="411480"/>
+            <a:ext cx="36576" cy="502920"/>
+          </a:xfrm>
+          <a:prstGeom prst="rect">
+            <a:avLst/>
+          </a:prstGeom>
+          <a:solidFill>
+            <a:srgbClr val="5046E5"/>
+          </a:solidFill>
+          <a:ln>
+            <a:noFill/>
+          </a:ln>
+        </p:spPr>
+        <p:style>
+          <a:lnRef idx="1">
+            <a:schemeClr val="accent1"/>
+          </a:lnRef>
+          <a:fillRef idx="3">
+            <a:schemeClr val="accent1"/>
+          </a:fillRef>
+          <a:effectRef idx="2">
+            <a:schemeClr val="accent1"/>
+          </a:effectRef>
+          <a:fontRef idx="minor">
+            <a:schemeClr val="lt1"/>
+          </a:fontRef>
+        </p:style>
+        <p:txBody>
+          <a:bodyPr rtlCol="0" anchor="ctr"/>
+          <a:lstStyle/>
+          <a:p>
+            <a:pPr algn="ctr"/>
+          </a:p>
+        </p:txBody>
+      </p:sp>
+      <p:sp>
+        <p:nvSpPr>
+          <p:cNvPr id="4" name="TextBox 3"/>
           <p:cNvSpPr txBox="1"/>
           <p:nvPr/>
         </p:nvSpPr>
         <p:spPr>
           <a:xfrm>
-            <a:off x="731520" y="365760"/>
-            <a:ext cx="10515600" cy="822960"/>
+            <a:off x="777240" y="365760"/>
+            <a:ext cx="10058400" cy="640080"/>
           </a:xfrm>
           <a:prstGeom prst="rect">
             <a:avLst/>
@@ -5762,12 +6334,12 @@
           </a:bodyPr>
           <a:lstStyle/>
           <a:p>
-            <a:pPr>
-              <a:defRPr sz="3200" b="1">
-                <a:solidFill>
-                  <a:srgbClr val="222222"/>
-                </a:solidFill>
-                <a:latin typeface="Calibri"/>
+            <a:pPr algn="l">
+              <a:defRPr sz="2800" b="1">
+                <a:solidFill>
+                  <a:srgbClr val="111111"/>
+                </a:solidFill>
+                <a:latin typeface="Inter"/>
               </a:defRPr>
             </a:pPr>
             <a:r>
@@ -5778,14 +6350,14 @@
       </p:sp>
       <p:sp>
         <p:nvSpPr>
-          <p:cNvPr id="4" name="TextBox 3"/>
+          <p:cNvPr id="5" name="TextBox 4"/>
           <p:cNvSpPr txBox="1"/>
           <p:nvPr/>
         </p:nvSpPr>
         <p:spPr>
           <a:xfrm>
-            <a:off x="914400" y="1463040"/>
-            <a:ext cx="10058400" cy="4754880"/>
+            <a:off x="822960" y="1188720"/>
+            <a:ext cx="10241280" cy="5120640"/>
           </a:xfrm>
           <a:prstGeom prst="rect">
             <a:avLst/>
@@ -5800,13 +6372,13 @@
           <a:p>
             <a:pPr>
               <a:spcAft>
-                <a:spcPts val="800"/>
+                <a:spcPts val="600"/>
               </a:spcAft>
-              <a:defRPr sz="2200" b="0">
-                <a:solidFill>
-                  <a:srgbClr val="222222"/>
-                </a:solidFill>
-                <a:latin typeface="Calibri"/>
+              <a:defRPr sz="1900">
+                <a:solidFill>
+                  <a:srgbClr val="333333"/>
+                </a:solidFill>
+                <a:latin typeface="Inter"/>
               </a:defRPr>
             </a:pPr>
             <a:r>
@@ -5816,129 +6388,149 @@
           <a:p>
             <a:pPr>
               <a:spcAft>
-                <a:spcPts val="800"/>
-              </a:spcAft>
-              <a:defRPr sz="2200" b="0">
-                <a:solidFill>
-                  <a:srgbClr val="222222"/>
-                </a:solidFill>
-                <a:latin typeface="Calibri"/>
-              </a:defRPr>
-            </a:pPr>
-            <a:r>
-              <a:t>Key columns:</a:t>
-            </a:r>
-          </a:p>
-          <a:p>
-            <a:pPr lvl="1">
-              <a:spcAft>
-                <a:spcPts val="800"/>
+                <a:spcPts val="600"/>
               </a:spcAft>
               <a:defRPr sz="1900">
                 <a:solidFill>
-                  <a:srgbClr val="222222"/>
-                </a:solidFill>
-                <a:latin typeface="Calibri"/>
-              </a:defRPr>
-            </a:pPr>
-            <a:r>
-              <a:t>Source: factor or interaction name</a:t>
-            </a:r>
-          </a:p>
-          <a:p>
-            <a:pPr lvl="1">
+                  <a:srgbClr val="333333"/>
+                </a:solidFill>
+                <a:latin typeface="Inter"/>
+              </a:defRPr>
+            </a:pPr>
+            <a:r>
+              <a:t>Source — factor or interaction name</a:t>
+            </a:r>
+          </a:p>
+          <a:p>
+            <a:pPr>
               <a:spcAft>
-                <a:spcPts val="800"/>
+                <a:spcPts val="600"/>
               </a:spcAft>
               <a:defRPr sz="1900">
                 <a:solidFill>
-                  <a:srgbClr val="222222"/>
-                </a:solidFill>
-                <a:latin typeface="Calibri"/>
-              </a:defRPr>
-            </a:pPr>
-            <a:r>
-              <a:t>SS: Sum of Squares (variability explained)</a:t>
-            </a:r>
-          </a:p>
-          <a:p>
-            <a:pPr lvl="1">
+                  <a:srgbClr val="333333"/>
+                </a:solidFill>
+                <a:latin typeface="Inter"/>
+              </a:defRPr>
+            </a:pPr>
+            <a:r>
+              <a:t>SS — Sum of Squares (variability explained)</a:t>
+            </a:r>
+          </a:p>
+          <a:p>
+            <a:pPr>
               <a:spcAft>
-                <a:spcPts val="800"/>
+                <a:spcPts val="600"/>
               </a:spcAft>
               <a:defRPr sz="1900">
                 <a:solidFill>
-                  <a:srgbClr val="222222"/>
-                </a:solidFill>
-                <a:latin typeface="Calibri"/>
-              </a:defRPr>
-            </a:pPr>
-            <a:r>
-              <a:t>DF: Degrees of Freedom</a:t>
-            </a:r>
-          </a:p>
-          <a:p>
-            <a:pPr lvl="1">
+                  <a:srgbClr val="333333"/>
+                </a:solidFill>
+                <a:latin typeface="Inter"/>
+              </a:defRPr>
+            </a:pPr>
+            <a:r>
+              <a:t>DF — Degrees of Freedom</a:t>
+            </a:r>
+          </a:p>
+          <a:p>
+            <a:pPr>
               <a:spcAft>
-                <a:spcPts val="800"/>
+                <a:spcPts val="600"/>
               </a:spcAft>
               <a:defRPr sz="1900">
                 <a:solidFill>
-                  <a:srgbClr val="222222"/>
-                </a:solidFill>
-                <a:latin typeface="Calibri"/>
-              </a:defRPr>
-            </a:pPr>
-            <a:r>
-              <a:t>MS: Mean Square (SS / DF)</a:t>
-            </a:r>
-          </a:p>
-          <a:p>
-            <a:pPr lvl="1">
+                  <a:srgbClr val="333333"/>
+                </a:solidFill>
+                <a:latin typeface="Inter"/>
+              </a:defRPr>
+            </a:pPr>
+            <a:r>
+              <a:t>MS — Mean Square (SS / DF)</a:t>
+            </a:r>
+          </a:p>
+          <a:p>
+            <a:pPr>
               <a:spcAft>
-                <a:spcPts val="800"/>
+                <a:spcPts val="600"/>
               </a:spcAft>
               <a:defRPr sz="1900">
                 <a:solidFill>
-                  <a:srgbClr val="222222"/>
-                </a:solidFill>
-                <a:latin typeface="Calibri"/>
-              </a:defRPr>
-            </a:pPr>
-            <a:r>
-              <a:t>F-value: test statistic (higher = stronger effect)</a:t>
-            </a:r>
-          </a:p>
-          <a:p>
-            <a:pPr lvl="1">
+                  <a:srgbClr val="333333"/>
+                </a:solidFill>
+                <a:latin typeface="Inter"/>
+              </a:defRPr>
+            </a:pPr>
+            <a:r>
+              <a:t>F-value — test statistic (higher = stronger effect)</a:t>
+            </a:r>
+          </a:p>
+          <a:p>
+            <a:pPr>
               <a:spcAft>
-                <a:spcPts val="800"/>
+                <a:spcPts val="600"/>
               </a:spcAft>
               <a:defRPr sz="1900">
                 <a:solidFill>
-                  <a:srgbClr val="222222"/>
-                </a:solidFill>
-                <a:latin typeface="Calibri"/>
-              </a:defRPr>
-            </a:pPr>
-            <a:r>
-              <a:t>p-value: probability effect is due to chance</a:t>
+                  <a:srgbClr val="333333"/>
+                </a:solidFill>
+                <a:latin typeface="Inter"/>
+              </a:defRPr>
+            </a:pPr>
+            <a:r>
+              <a:t>p-value — probability effect is due to chance</a:t>
             </a:r>
           </a:p>
           <a:p>
             <a:pPr>
               <a:spcAft>
-                <a:spcPts val="800"/>
+                <a:spcPts val="600"/>
               </a:spcAft>
-              <a:defRPr sz="2200" b="0">
-                <a:solidFill>
-                  <a:srgbClr val="222222"/>
-                </a:solidFill>
-                <a:latin typeface="Calibri"/>
+              <a:defRPr sz="1900">
+                <a:solidFill>
+                  <a:srgbClr val="333333"/>
+                </a:solidFill>
+                <a:latin typeface="Inter"/>
               </a:defRPr>
             </a:pPr>
             <a:r>
               <a:t>Rule of thumb: p &lt; 0.05 means the factor is significant</a:t>
+            </a:r>
+          </a:p>
+        </p:txBody>
+      </p:sp>
+      <p:sp>
+        <p:nvSpPr>
+          <p:cNvPr id="6" name="TextBox 5"/>
+          <p:cNvSpPr txBox="1"/>
+          <p:nvPr/>
+        </p:nvSpPr>
+        <p:spPr>
+          <a:xfrm>
+            <a:off x="731520" y="6400800"/>
+            <a:ext cx="10058400" cy="365760"/>
+          </a:xfrm>
+          <a:prstGeom prst="rect">
+            <a:avLst/>
+          </a:prstGeom>
+          <a:noFill/>
+        </p:spPr>
+        <p:txBody>
+          <a:bodyPr wrap="square">
+            <a:spAutoFit/>
+          </a:bodyPr>
+          <a:lstStyle/>
+          <a:p>
+            <a:pPr algn="l">
+              <a:defRPr sz="1000" b="0">
+                <a:solidFill>
+                  <a:srgbClr val="999999"/>
+                </a:solidFill>
+                <a:latin typeface="Consolas"/>
+              </a:defRPr>
+            </a:pPr>
+            <a:r>
+              <a:t>© 2026 Martin J. Gallagher  |  GPL-3.0-or-later  |  doehelper.com</a:t>
             </a:r>
           </a:p>
         </p:txBody>
@@ -5957,7 +6549,7 @@
     <p:bg>
       <p:bgPr>
         <a:solidFill>
-          <a:srgbClr val="FFFFFF"/>
+          <a:srgbClr val="FAFAFA"/>
         </a:solidFill>
         <a:effectLst/>
       </p:bgPr>
@@ -5978,13 +6570,13 @@
         <p:spPr>
           <a:xfrm>
             <a:off x="0" y="0"/>
-            <a:ext cx="12191695" cy="54864"/>
+            <a:ext cx="12191695" cy="45720"/>
           </a:xfrm>
           <a:prstGeom prst="rect">
             <a:avLst/>
           </a:prstGeom>
           <a:solidFill>
-            <a:srgbClr val="007BFF"/>
+            <a:srgbClr val="5046E5"/>
           </a:solidFill>
           <a:ln>
             <a:noFill/>
@@ -6014,14 +6606,57 @@
       </p:sp>
       <p:sp>
         <p:nvSpPr>
-          <p:cNvPr id="3" name="TextBox 2"/>
+          <p:cNvPr id="3" name="Rectangle 2"/>
+          <p:cNvSpPr/>
+          <p:nvPr/>
+        </p:nvSpPr>
+        <p:spPr>
+          <a:xfrm>
+            <a:off x="548640" y="411480"/>
+            <a:ext cx="36576" cy="502920"/>
+          </a:xfrm>
+          <a:prstGeom prst="rect">
+            <a:avLst/>
+          </a:prstGeom>
+          <a:solidFill>
+            <a:srgbClr val="5046E5"/>
+          </a:solidFill>
+          <a:ln>
+            <a:noFill/>
+          </a:ln>
+        </p:spPr>
+        <p:style>
+          <a:lnRef idx="1">
+            <a:schemeClr val="accent1"/>
+          </a:lnRef>
+          <a:fillRef idx="3">
+            <a:schemeClr val="accent1"/>
+          </a:fillRef>
+          <a:effectRef idx="2">
+            <a:schemeClr val="accent1"/>
+          </a:effectRef>
+          <a:fontRef idx="minor">
+            <a:schemeClr val="lt1"/>
+          </a:fontRef>
+        </p:style>
+        <p:txBody>
+          <a:bodyPr rtlCol="0" anchor="ctr"/>
+          <a:lstStyle/>
+          <a:p>
+            <a:pPr algn="ctr"/>
+          </a:p>
+        </p:txBody>
+      </p:sp>
+      <p:sp>
+        <p:nvSpPr>
+          <p:cNvPr id="4" name="TextBox 3"/>
           <p:cNvSpPr txBox="1"/>
           <p:nvPr/>
         </p:nvSpPr>
         <p:spPr>
           <a:xfrm>
-            <a:off x="731520" y="365760"/>
-            <a:ext cx="10515600" cy="822960"/>
+            <a:off x="777240" y="365760"/>
+            <a:ext cx="10058400" cy="640080"/>
           </a:xfrm>
           <a:prstGeom prst="rect">
             <a:avLst/>
@@ -6034,30 +6669,30 @@
           </a:bodyPr>
           <a:lstStyle/>
           <a:p>
-            <a:pPr>
-              <a:defRPr sz="3200" b="1">
-                <a:solidFill>
-                  <a:srgbClr val="222222"/>
-                </a:solidFill>
-                <a:latin typeface="Calibri"/>
-              </a:defRPr>
-            </a:pPr>
-            <a:r>
-              <a:t>Reading the Pareto Chart</a:t>
-            </a:r>
-          </a:p>
-        </p:txBody>
-      </p:sp>
-      <p:sp>
-        <p:nvSpPr>
-          <p:cNvPr id="4" name="TextBox 3"/>
+            <a:pPr algn="l">
+              <a:defRPr sz="2800" b="1">
+                <a:solidFill>
+                  <a:srgbClr val="111111"/>
+                </a:solidFill>
+                <a:latin typeface="Inter"/>
+              </a:defRPr>
+            </a:pPr>
+            <a:r>
+              <a:t>Pareto Chart &amp; Center Points</a:t>
+            </a:r>
+          </a:p>
+        </p:txBody>
+      </p:sp>
+      <p:sp>
+        <p:nvSpPr>
+          <p:cNvPr id="5" name="TextBox 4"/>
           <p:cNvSpPr txBox="1"/>
           <p:nvPr/>
         </p:nvSpPr>
         <p:spPr>
           <a:xfrm>
-            <a:off x="914400" y="1463040"/>
-            <a:ext cx="10058400" cy="4754880"/>
+            <a:off x="822960" y="1188720"/>
+            <a:ext cx="10241280" cy="5120640"/>
           </a:xfrm>
           <a:prstGeom prst="rect">
             <a:avLst/>
@@ -6072,81 +6707,178 @@
           <a:p>
             <a:pPr>
               <a:spcAft>
-                <a:spcPts val="800"/>
+                <a:spcPts val="600"/>
               </a:spcAft>
-              <a:defRPr sz="2200" b="0">
-                <a:solidFill>
-                  <a:srgbClr val="222222"/>
-                </a:solidFill>
-                <a:latin typeface="Calibri"/>
-              </a:defRPr>
-            </a:pPr>
-            <a:r>
-              <a:t>Bar chart of absolute effect magnitudes, sorted largest to smallest</a:t>
+              <a:defRPr sz="1900">
+                <a:solidFill>
+                  <a:srgbClr val="333333"/>
+                </a:solidFill>
+                <a:latin typeface="Inter"/>
+              </a:defRPr>
+            </a:pPr>
+            <a:r>
+              <a:t>Pareto chart: bar chart of absolute effect magnitudes</a:t>
+            </a:r>
+          </a:p>
+          <a:p>
+            <a:pPr lvl="1">
+              <a:spcAft>
+                <a:spcPts val="600"/>
+              </a:spcAft>
+              <a:defRPr sz="1700">
+                <a:solidFill>
+                  <a:srgbClr val="666666"/>
+                </a:solidFill>
+                <a:latin typeface="Inter"/>
+              </a:defRPr>
+            </a:pPr>
+            <a:r>
+              <a:t>Sorted largest to smallest</a:t>
+            </a:r>
+          </a:p>
+          <a:p>
+            <a:pPr lvl="1">
+              <a:spcAft>
+                <a:spcPts val="600"/>
+              </a:spcAft>
+              <a:defRPr sz="1700">
+                <a:solidFill>
+                  <a:srgbClr val="666666"/>
+                </a:solidFill>
+                <a:latin typeface="Inter"/>
+              </a:defRPr>
+            </a:pPr>
+            <a:r>
+              <a:t>Dashed line shows significance threshold</a:t>
+            </a:r>
+          </a:p>
+          <a:p>
+            <a:pPr lvl="1">
+              <a:spcAft>
+                <a:spcPts val="600"/>
+              </a:spcAft>
+              <a:defRPr sz="1700">
+                <a:solidFill>
+                  <a:srgbClr val="666666"/>
+                </a:solidFill>
+                <a:latin typeface="Inter"/>
+              </a:defRPr>
+            </a:pPr>
+            <a:r>
+              <a:t>Bars above the line are statistically significant</a:t>
+            </a:r>
+          </a:p>
+          <a:p>
+            <a:pPr lvl="1">
+              <a:spcAft>
+                <a:spcPts val="600"/>
+              </a:spcAft>
+              <a:defRPr sz="1700">
+                <a:solidFill>
+                  <a:srgbClr val="666666"/>
+                </a:solidFill>
+                <a:latin typeface="Inter"/>
+              </a:defRPr>
+            </a:pPr>
+            <a:r>
+              <a:t>Quickly identifies the "vital few" factors</a:t>
             </a:r>
           </a:p>
           <a:p>
             <a:pPr>
               <a:spcAft>
-                <a:spcPts val="800"/>
+                <a:spcPts val="600"/>
               </a:spcAft>
-              <a:defRPr sz="2200" b="0">
-                <a:solidFill>
-                  <a:srgbClr val="222222"/>
-                </a:solidFill>
-                <a:latin typeface="Calibri"/>
-              </a:defRPr>
-            </a:pPr>
-            <a:r>
-              <a:t>Dashed reference line shows significance threshold</a:t>
-            </a:r>
+              <a:defRPr sz="1900">
+                <a:solidFill>
+                  <a:srgbClr val="333333"/>
+                </a:solidFill>
+                <a:latin typeface="Inter"/>
+              </a:defRPr>
+            </a:pPr>
           </a:p>
           <a:p>
             <a:pPr>
               <a:spcAft>
-                <a:spcPts val="800"/>
+                <a:spcPts val="600"/>
               </a:spcAft>
-              <a:defRPr sz="2200" b="0">
-                <a:solidFill>
-                  <a:srgbClr val="222222"/>
-                </a:solidFill>
-                <a:latin typeface="Calibri"/>
-              </a:defRPr>
-            </a:pPr>
-            <a:r>
-              <a:t>Bars above the line are statistically significant effects</a:t>
-            </a:r>
-          </a:p>
-          <a:p>
-            <a:pPr>
+              <a:defRPr sz="1900">
+                <a:solidFill>
+                  <a:srgbClr val="333333"/>
+                </a:solidFill>
+                <a:latin typeface="Inter"/>
+              </a:defRPr>
+            </a:pPr>
+            <a:r>
+              <a:t>Center points: extra runs at the midpoint of all factors</a:t>
+            </a:r>
+          </a:p>
+          <a:p>
+            <a:pPr lvl="1">
               <a:spcAft>
-                <a:spcPts val="800"/>
+                <a:spcPts val="600"/>
               </a:spcAft>
-              <a:defRPr sz="2200" b="0">
-                <a:solidFill>
-                  <a:srgbClr val="222222"/>
-                </a:solidFill>
-                <a:latin typeface="Calibri"/>
-              </a:defRPr>
-            </a:pPr>
-            <a:r>
-              <a:t>Quickly identifies the "vital few" factors</a:t>
-            </a:r>
-          </a:p>
-          <a:p>
-            <a:pPr>
+              <a:defRPr sz="1700">
+                <a:solidFill>
+                  <a:srgbClr val="666666"/>
+                </a:solidFill>
+                <a:latin typeface="Inter"/>
+              </a:defRPr>
+            </a:pPr>
+            <a:r>
+              <a:t>Detect curvature (non-linear effects)</a:t>
+            </a:r>
+          </a:p>
+          <a:p>
+            <a:pPr lvl="1">
               <a:spcAft>
-                <a:spcPts val="800"/>
+                <a:spcPts val="600"/>
               </a:spcAft>
-              <a:defRPr sz="2200" b="0">
-                <a:solidFill>
-                  <a:srgbClr val="222222"/>
-                </a:solidFill>
-                <a:latin typeface="Calibri"/>
-              </a:defRPr>
-            </a:pPr>
-            <a:r>
-              <a:t>doe-helper generates this automatically with doe analyze</a:t>
+              <a:defRPr sz="1700">
+                <a:solidFill>
+                  <a:srgbClr val="666666"/>
+                </a:solidFill>
+                <a:latin typeface="Inter"/>
+              </a:defRPr>
+            </a:pPr>
+            <a:r>
+              <a:t>Cheap insurance: 3–5 center points cost little</a:t>
+            </a:r>
+          </a:p>
+        </p:txBody>
+      </p:sp>
+      <p:sp>
+        <p:nvSpPr>
+          <p:cNvPr id="6" name="TextBox 5"/>
+          <p:cNvSpPr txBox="1"/>
+          <p:nvPr/>
+        </p:nvSpPr>
+        <p:spPr>
+          <a:xfrm>
+            <a:off x="731520" y="6400800"/>
+            <a:ext cx="10058400" cy="365760"/>
+          </a:xfrm>
+          <a:prstGeom prst="rect">
+            <a:avLst/>
+          </a:prstGeom>
+          <a:noFill/>
+        </p:spPr>
+        <p:txBody>
+          <a:bodyPr wrap="square">
+            <a:spAutoFit/>
+          </a:bodyPr>
+          <a:lstStyle/>
+          <a:p>
+            <a:pPr algn="l">
+              <a:defRPr sz="1000" b="0">
+                <a:solidFill>
+                  <a:srgbClr val="999999"/>
+                </a:solidFill>
+                <a:latin typeface="Consolas"/>
+              </a:defRPr>
+            </a:pPr>
+            <a:r>
+              <a:t>© 2026 Martin J. Gallagher  |  GPL-3.0-or-later  |  doehelper.com</a:t>
             </a:r>
           </a:p>
         </p:txBody>
@@ -6165,7 +6897,7 @@
     <p:bg>
       <p:bgPr>
         <a:solidFill>
-          <a:srgbClr val="FFFFFF"/>
+          <a:srgbClr val="1E1B4B"/>
         </a:solidFill>
         <a:effectLst/>
       </p:bgPr>
@@ -6185,14 +6917,14 @@
         </p:nvSpPr>
         <p:spPr>
           <a:xfrm>
-            <a:off x="0" y="0"/>
-            <a:ext cx="12191695" cy="54864"/>
+            <a:off x="3657600" y="0"/>
+            <a:ext cx="4572000" cy="6858000"/>
           </a:xfrm>
           <a:prstGeom prst="rect">
             <a:avLst/>
           </a:prstGeom>
           <a:solidFill>
-            <a:srgbClr val="007BFF"/>
+            <a:srgbClr val="312E81"/>
           </a:solidFill>
           <a:ln>
             <a:noFill/>
@@ -6222,14 +6954,57 @@
       </p:sp>
       <p:sp>
         <p:nvSpPr>
-          <p:cNvPr id="3" name="TextBox 2"/>
+          <p:cNvPr id="3" name="Rectangle 2"/>
+          <p:cNvSpPr/>
+          <p:nvPr/>
+        </p:nvSpPr>
+        <p:spPr>
+          <a:xfrm>
+            <a:off x="8229600" y="0"/>
+            <a:ext cx="3962095" cy="6858000"/>
+          </a:xfrm>
+          <a:prstGeom prst="rect">
+            <a:avLst/>
+          </a:prstGeom>
+          <a:solidFill>
+            <a:srgbClr val="4338CA"/>
+          </a:solidFill>
+          <a:ln>
+            <a:noFill/>
+          </a:ln>
+        </p:spPr>
+        <p:style>
+          <a:lnRef idx="1">
+            <a:schemeClr val="accent1"/>
+          </a:lnRef>
+          <a:fillRef idx="3">
+            <a:schemeClr val="accent1"/>
+          </a:fillRef>
+          <a:effectRef idx="2">
+            <a:schemeClr val="accent1"/>
+          </a:effectRef>
+          <a:fontRef idx="minor">
+            <a:schemeClr val="lt1"/>
+          </a:fontRef>
+        </p:style>
+        <p:txBody>
+          <a:bodyPr rtlCol="0" anchor="ctr"/>
+          <a:lstStyle/>
+          <a:p>
+            <a:pPr algn="ctr"/>
+          </a:p>
+        </p:txBody>
+      </p:sp>
+      <p:sp>
+        <p:nvSpPr>
+          <p:cNvPr id="4" name="TextBox 3"/>
           <p:cNvSpPr txBox="1"/>
           <p:nvPr/>
         </p:nvSpPr>
         <p:spPr>
           <a:xfrm>
             <a:off x="731520" y="365760"/>
-            <a:ext cx="10515600" cy="822960"/>
+            <a:ext cx="10058400" cy="640080"/>
           </a:xfrm>
           <a:prstGeom prst="rect">
             <a:avLst/>
@@ -6242,30 +7017,640 @@
           </a:bodyPr>
           <a:lstStyle/>
           <a:p>
-            <a:pPr>
-              <a:defRPr sz="3200" b="1">
-                <a:solidFill>
-                  <a:srgbClr val="222222"/>
-                </a:solidFill>
-                <a:latin typeface="Calibri"/>
-              </a:defRPr>
-            </a:pPr>
-            <a:r>
-              <a:t>Center Points</a:t>
-            </a:r>
-          </a:p>
-        </p:txBody>
-      </p:sp>
-      <p:sp>
-        <p:nvSpPr>
-          <p:cNvPr id="4" name="TextBox 3"/>
+            <a:pPr algn="l">
+              <a:defRPr sz="3000" b="1">
+                <a:solidFill>
+                  <a:srgbClr val="FFFFFF"/>
+                </a:solidFill>
+                <a:latin typeface="Inter"/>
+              </a:defRPr>
+            </a:pPr>
+            <a:r>
+              <a:t>Key Takeaways</a:t>
+            </a:r>
+          </a:p>
+        </p:txBody>
+      </p:sp>
+      <p:sp>
+        <p:nvSpPr>
+          <p:cNvPr id="5" name="Rounded Rectangle 4"/>
+          <p:cNvSpPr/>
+          <p:nvPr/>
+        </p:nvSpPr>
+        <p:spPr>
+          <a:xfrm>
+            <a:off x="731520" y="1280160"/>
+            <a:ext cx="10515600" cy="777240"/>
+          </a:xfrm>
+          <a:prstGeom prst="roundRect">
+            <a:avLst/>
+          </a:prstGeom>
+          <a:solidFill>
+            <a:srgbClr val="312E81"/>
+          </a:solidFill>
+          <a:ln>
+            <a:noFill/>
+          </a:ln>
+        </p:spPr>
+        <p:style>
+          <a:lnRef idx="1">
+            <a:schemeClr val="accent1"/>
+          </a:lnRef>
+          <a:fillRef idx="3">
+            <a:schemeClr val="accent1"/>
+          </a:fillRef>
+          <a:effectRef idx="2">
+            <a:schemeClr val="accent1"/>
+          </a:effectRef>
+          <a:fontRef idx="minor">
+            <a:schemeClr val="lt1"/>
+          </a:fontRef>
+        </p:style>
+        <p:txBody>
+          <a:bodyPr rtlCol="0" anchor="ctr"/>
+          <a:lstStyle/>
+          <a:p>
+            <a:pPr algn="ctr"/>
+          </a:p>
+        </p:txBody>
+      </p:sp>
+      <p:sp>
+        <p:nvSpPr>
+          <p:cNvPr id="6" name="Oval 5"/>
+          <p:cNvSpPr/>
+          <p:nvPr/>
+        </p:nvSpPr>
+        <p:spPr>
+          <a:xfrm>
+            <a:off x="1005840" y="1508760"/>
+            <a:ext cx="320040" cy="320040"/>
+          </a:xfrm>
+          <a:prstGeom prst="ellipse">
+            <a:avLst/>
+          </a:prstGeom>
+          <a:solidFill>
+            <a:srgbClr val="5046E5"/>
+          </a:solidFill>
+          <a:ln>
+            <a:noFill/>
+          </a:ln>
+        </p:spPr>
+        <p:style>
+          <a:lnRef idx="1">
+            <a:schemeClr val="accent1"/>
+          </a:lnRef>
+          <a:fillRef idx="3">
+            <a:schemeClr val="accent1"/>
+          </a:fillRef>
+          <a:effectRef idx="2">
+            <a:schemeClr val="accent1"/>
+          </a:effectRef>
+          <a:fontRef idx="minor">
+            <a:schemeClr val="lt1"/>
+          </a:fontRef>
+        </p:style>
+        <p:txBody>
+          <a:bodyPr rtlCol="0" anchor="ctr"/>
+          <a:lstStyle/>
+          <a:p>
+            <a:pPr algn="ctr"/>
+          </a:p>
+        </p:txBody>
+      </p:sp>
+      <p:sp>
+        <p:nvSpPr>
+          <p:cNvPr id="7" name="TextBox 6"/>
           <p:cNvSpPr txBox="1"/>
           <p:nvPr/>
         </p:nvSpPr>
         <p:spPr>
           <a:xfrm>
-            <a:off x="914400" y="1463040"/>
-            <a:ext cx="10058400" cy="4754880"/>
+            <a:off x="1554480" y="1325880"/>
+            <a:ext cx="9418320" cy="777240"/>
+          </a:xfrm>
+          <a:prstGeom prst="rect">
+            <a:avLst/>
+          </a:prstGeom>
+          <a:noFill/>
+        </p:spPr>
+        <p:txBody>
+          <a:bodyPr wrap="square" anchor="ctr">
+            <a:spAutoFit/>
+          </a:bodyPr>
+          <a:lstStyle/>
+          <a:p>
+            <a:pPr algn="l">
+              <a:defRPr sz="1800" b="0">
+                <a:solidFill>
+                  <a:srgbClr val="FFFFFF"/>
+                </a:solidFill>
+                <a:latin typeface="Inter"/>
+              </a:defRPr>
+            </a:pPr>
+            <a:r>
+              <a:t>Full factorial = every combination, captures all effects</a:t>
+            </a:r>
+          </a:p>
+        </p:txBody>
+      </p:sp>
+      <p:sp>
+        <p:nvSpPr>
+          <p:cNvPr id="8" name="Rounded Rectangle 7"/>
+          <p:cNvSpPr/>
+          <p:nvPr/>
+        </p:nvSpPr>
+        <p:spPr>
+          <a:xfrm>
+            <a:off x="731520" y="2167128"/>
+            <a:ext cx="10515600" cy="777240"/>
+          </a:xfrm>
+          <a:prstGeom prst="roundRect">
+            <a:avLst/>
+          </a:prstGeom>
+          <a:solidFill>
+            <a:srgbClr val="312E81"/>
+          </a:solidFill>
+          <a:ln>
+            <a:noFill/>
+          </a:ln>
+        </p:spPr>
+        <p:style>
+          <a:lnRef idx="1">
+            <a:schemeClr val="accent1"/>
+          </a:lnRef>
+          <a:fillRef idx="3">
+            <a:schemeClr val="accent1"/>
+          </a:fillRef>
+          <a:effectRef idx="2">
+            <a:schemeClr val="accent1"/>
+          </a:effectRef>
+          <a:fontRef idx="minor">
+            <a:schemeClr val="lt1"/>
+          </a:fontRef>
+        </p:style>
+        <p:txBody>
+          <a:bodyPr rtlCol="0" anchor="ctr"/>
+          <a:lstStyle/>
+          <a:p>
+            <a:pPr algn="ctr"/>
+          </a:p>
+        </p:txBody>
+      </p:sp>
+      <p:sp>
+        <p:nvSpPr>
+          <p:cNvPr id="9" name="Oval 8"/>
+          <p:cNvSpPr/>
+          <p:nvPr/>
+        </p:nvSpPr>
+        <p:spPr>
+          <a:xfrm>
+            <a:off x="1005840" y="2395728"/>
+            <a:ext cx="320040" cy="320040"/>
+          </a:xfrm>
+          <a:prstGeom prst="ellipse">
+            <a:avLst/>
+          </a:prstGeom>
+          <a:solidFill>
+            <a:srgbClr val="5046E5"/>
+          </a:solidFill>
+          <a:ln>
+            <a:noFill/>
+          </a:ln>
+        </p:spPr>
+        <p:style>
+          <a:lnRef idx="1">
+            <a:schemeClr val="accent1"/>
+          </a:lnRef>
+          <a:fillRef idx="3">
+            <a:schemeClr val="accent1"/>
+          </a:fillRef>
+          <a:effectRef idx="2">
+            <a:schemeClr val="accent1"/>
+          </a:effectRef>
+          <a:fontRef idx="minor">
+            <a:schemeClr val="lt1"/>
+          </a:fontRef>
+        </p:style>
+        <p:txBody>
+          <a:bodyPr rtlCol="0" anchor="ctr"/>
+          <a:lstStyle/>
+          <a:p>
+            <a:pPr algn="ctr"/>
+          </a:p>
+        </p:txBody>
+      </p:sp>
+      <p:sp>
+        <p:nvSpPr>
+          <p:cNvPr id="10" name="TextBox 9"/>
+          <p:cNvSpPr txBox="1"/>
+          <p:nvPr/>
+        </p:nvSpPr>
+        <p:spPr>
+          <a:xfrm>
+            <a:off x="1554480" y="2212848"/>
+            <a:ext cx="9418320" cy="777240"/>
+          </a:xfrm>
+          <a:prstGeom prst="rect">
+            <a:avLst/>
+          </a:prstGeom>
+          <a:noFill/>
+        </p:spPr>
+        <p:txBody>
+          <a:bodyPr wrap="square" anchor="ctr">
+            <a:spAutoFit/>
+          </a:bodyPr>
+          <a:lstStyle/>
+          <a:p>
+            <a:pPr algn="l">
+              <a:defRPr sz="1800" b="0">
+                <a:solidFill>
+                  <a:srgbClr val="FFFFFF"/>
+                </a:solidFill>
+                <a:latin typeface="Inter"/>
+              </a:defRPr>
+            </a:pPr>
+            <a:r>
+              <a:t>2ᵏ runs: practical for up to ~5–6 factors</a:t>
+            </a:r>
+          </a:p>
+        </p:txBody>
+      </p:sp>
+      <p:sp>
+        <p:nvSpPr>
+          <p:cNvPr id="11" name="Rounded Rectangle 10"/>
+          <p:cNvSpPr/>
+          <p:nvPr/>
+        </p:nvSpPr>
+        <p:spPr>
+          <a:xfrm>
+            <a:off x="731520" y="3054096"/>
+            <a:ext cx="10515600" cy="777240"/>
+          </a:xfrm>
+          <a:prstGeom prst="roundRect">
+            <a:avLst/>
+          </a:prstGeom>
+          <a:solidFill>
+            <a:srgbClr val="312E81"/>
+          </a:solidFill>
+          <a:ln>
+            <a:noFill/>
+          </a:ln>
+        </p:spPr>
+        <p:style>
+          <a:lnRef idx="1">
+            <a:schemeClr val="accent1"/>
+          </a:lnRef>
+          <a:fillRef idx="3">
+            <a:schemeClr val="accent1"/>
+          </a:fillRef>
+          <a:effectRef idx="2">
+            <a:schemeClr val="accent1"/>
+          </a:effectRef>
+          <a:fontRef idx="minor">
+            <a:schemeClr val="lt1"/>
+          </a:fontRef>
+        </p:style>
+        <p:txBody>
+          <a:bodyPr rtlCol="0" anchor="ctr"/>
+          <a:lstStyle/>
+          <a:p>
+            <a:pPr algn="ctr"/>
+          </a:p>
+        </p:txBody>
+      </p:sp>
+      <p:sp>
+        <p:nvSpPr>
+          <p:cNvPr id="12" name="Oval 11"/>
+          <p:cNvSpPr/>
+          <p:nvPr/>
+        </p:nvSpPr>
+        <p:spPr>
+          <a:xfrm>
+            <a:off x="1005840" y="3282696"/>
+            <a:ext cx="320040" cy="320040"/>
+          </a:xfrm>
+          <a:prstGeom prst="ellipse">
+            <a:avLst/>
+          </a:prstGeom>
+          <a:solidFill>
+            <a:srgbClr val="5046E5"/>
+          </a:solidFill>
+          <a:ln>
+            <a:noFill/>
+          </a:ln>
+        </p:spPr>
+        <p:style>
+          <a:lnRef idx="1">
+            <a:schemeClr val="accent1"/>
+          </a:lnRef>
+          <a:fillRef idx="3">
+            <a:schemeClr val="accent1"/>
+          </a:fillRef>
+          <a:effectRef idx="2">
+            <a:schemeClr val="accent1"/>
+          </a:effectRef>
+          <a:fontRef idx="minor">
+            <a:schemeClr val="lt1"/>
+          </a:fontRef>
+        </p:style>
+        <p:txBody>
+          <a:bodyPr rtlCol="0" anchor="ctr"/>
+          <a:lstStyle/>
+          <a:p>
+            <a:pPr algn="ctr"/>
+          </a:p>
+        </p:txBody>
+      </p:sp>
+      <p:sp>
+        <p:nvSpPr>
+          <p:cNvPr id="13" name="TextBox 12"/>
+          <p:cNvSpPr txBox="1"/>
+          <p:nvPr/>
+        </p:nvSpPr>
+        <p:spPr>
+          <a:xfrm>
+            <a:off x="1554480" y="3099816"/>
+            <a:ext cx="9418320" cy="777240"/>
+          </a:xfrm>
+          <a:prstGeom prst="rect">
+            <a:avLst/>
+          </a:prstGeom>
+          <a:noFill/>
+        </p:spPr>
+        <p:txBody>
+          <a:bodyPr wrap="square" anchor="ctr">
+            <a:spAutoFit/>
+          </a:bodyPr>
+          <a:lstStyle/>
+          <a:p>
+            <a:pPr algn="l">
+              <a:defRPr sz="1800" b="0">
+                <a:solidFill>
+                  <a:srgbClr val="FFFFFF"/>
+                </a:solidFill>
+                <a:latin typeface="Inter"/>
+              </a:defRPr>
+            </a:pPr>
+            <a:r>
+              <a:t>Interactions are why DOE beats OVAT</a:t>
+            </a:r>
+          </a:p>
+        </p:txBody>
+      </p:sp>
+      <p:sp>
+        <p:nvSpPr>
+          <p:cNvPr id="14" name="Rounded Rectangle 13"/>
+          <p:cNvSpPr/>
+          <p:nvPr/>
+        </p:nvSpPr>
+        <p:spPr>
+          <a:xfrm>
+            <a:off x="731520" y="3941064"/>
+            <a:ext cx="10515600" cy="777240"/>
+          </a:xfrm>
+          <a:prstGeom prst="roundRect">
+            <a:avLst/>
+          </a:prstGeom>
+          <a:solidFill>
+            <a:srgbClr val="312E81"/>
+          </a:solidFill>
+          <a:ln>
+            <a:noFill/>
+          </a:ln>
+        </p:spPr>
+        <p:style>
+          <a:lnRef idx="1">
+            <a:schemeClr val="accent1"/>
+          </a:lnRef>
+          <a:fillRef idx="3">
+            <a:schemeClr val="accent1"/>
+          </a:fillRef>
+          <a:effectRef idx="2">
+            <a:schemeClr val="accent1"/>
+          </a:effectRef>
+          <a:fontRef idx="minor">
+            <a:schemeClr val="lt1"/>
+          </a:fontRef>
+        </p:style>
+        <p:txBody>
+          <a:bodyPr rtlCol="0" anchor="ctr"/>
+          <a:lstStyle/>
+          <a:p>
+            <a:pPr algn="ctr"/>
+          </a:p>
+        </p:txBody>
+      </p:sp>
+      <p:sp>
+        <p:nvSpPr>
+          <p:cNvPr id="15" name="Oval 14"/>
+          <p:cNvSpPr/>
+          <p:nvPr/>
+        </p:nvSpPr>
+        <p:spPr>
+          <a:xfrm>
+            <a:off x="1005840" y="4169664"/>
+            <a:ext cx="320040" cy="320040"/>
+          </a:xfrm>
+          <a:prstGeom prst="ellipse">
+            <a:avLst/>
+          </a:prstGeom>
+          <a:solidFill>
+            <a:srgbClr val="5046E5"/>
+          </a:solidFill>
+          <a:ln>
+            <a:noFill/>
+          </a:ln>
+        </p:spPr>
+        <p:style>
+          <a:lnRef idx="1">
+            <a:schemeClr val="accent1"/>
+          </a:lnRef>
+          <a:fillRef idx="3">
+            <a:schemeClr val="accent1"/>
+          </a:fillRef>
+          <a:effectRef idx="2">
+            <a:schemeClr val="accent1"/>
+          </a:effectRef>
+          <a:fontRef idx="minor">
+            <a:schemeClr val="lt1"/>
+          </a:fontRef>
+        </p:style>
+        <p:txBody>
+          <a:bodyPr rtlCol="0" anchor="ctr"/>
+          <a:lstStyle/>
+          <a:p>
+            <a:pPr algn="ctr"/>
+          </a:p>
+        </p:txBody>
+      </p:sp>
+      <p:sp>
+        <p:nvSpPr>
+          <p:cNvPr id="16" name="TextBox 15"/>
+          <p:cNvSpPr txBox="1"/>
+          <p:nvPr/>
+        </p:nvSpPr>
+        <p:spPr>
+          <a:xfrm>
+            <a:off x="1554480" y="3986784"/>
+            <a:ext cx="9418320" cy="777240"/>
+          </a:xfrm>
+          <a:prstGeom prst="rect">
+            <a:avLst/>
+          </a:prstGeom>
+          <a:noFill/>
+        </p:spPr>
+        <p:txBody>
+          <a:bodyPr wrap="square" anchor="ctr">
+            <a:spAutoFit/>
+          </a:bodyPr>
+          <a:lstStyle/>
+          <a:p>
+            <a:pPr algn="l">
+              <a:defRPr sz="1800" b="0">
+                <a:solidFill>
+                  <a:srgbClr val="FFFFFF"/>
+                </a:solidFill>
+                <a:latin typeface="Inter"/>
+              </a:defRPr>
+            </a:pPr>
+            <a:r>
+              <a:t>Center points detect curvature cheaply</a:t>
+            </a:r>
+          </a:p>
+        </p:txBody>
+      </p:sp>
+      <p:sp>
+        <p:nvSpPr>
+          <p:cNvPr id="17" name="Rounded Rectangle 16"/>
+          <p:cNvSpPr/>
+          <p:nvPr/>
+        </p:nvSpPr>
+        <p:spPr>
+          <a:xfrm>
+            <a:off x="731520" y="4828032"/>
+            <a:ext cx="10515600" cy="777240"/>
+          </a:xfrm>
+          <a:prstGeom prst="roundRect">
+            <a:avLst/>
+          </a:prstGeom>
+          <a:solidFill>
+            <a:srgbClr val="312E81"/>
+          </a:solidFill>
+          <a:ln>
+            <a:noFill/>
+          </a:ln>
+        </p:spPr>
+        <p:style>
+          <a:lnRef idx="1">
+            <a:schemeClr val="accent1"/>
+          </a:lnRef>
+          <a:fillRef idx="3">
+            <a:schemeClr val="accent1"/>
+          </a:fillRef>
+          <a:effectRef idx="2">
+            <a:schemeClr val="accent1"/>
+          </a:effectRef>
+          <a:fontRef idx="minor">
+            <a:schemeClr val="lt1"/>
+          </a:fontRef>
+        </p:style>
+        <p:txBody>
+          <a:bodyPr rtlCol="0" anchor="ctr"/>
+          <a:lstStyle/>
+          <a:p>
+            <a:pPr algn="ctr"/>
+          </a:p>
+        </p:txBody>
+      </p:sp>
+      <p:sp>
+        <p:nvSpPr>
+          <p:cNvPr id="18" name="Oval 17"/>
+          <p:cNvSpPr/>
+          <p:nvPr/>
+        </p:nvSpPr>
+        <p:spPr>
+          <a:xfrm>
+            <a:off x="1005840" y="5056632"/>
+            <a:ext cx="320040" cy="320040"/>
+          </a:xfrm>
+          <a:prstGeom prst="ellipse">
+            <a:avLst/>
+          </a:prstGeom>
+          <a:solidFill>
+            <a:srgbClr val="5046E5"/>
+          </a:solidFill>
+          <a:ln>
+            <a:noFill/>
+          </a:ln>
+        </p:spPr>
+        <p:style>
+          <a:lnRef idx="1">
+            <a:schemeClr val="accent1"/>
+          </a:lnRef>
+          <a:fillRef idx="3">
+            <a:schemeClr val="accent1"/>
+          </a:fillRef>
+          <a:effectRef idx="2">
+            <a:schemeClr val="accent1"/>
+          </a:effectRef>
+          <a:fontRef idx="minor">
+            <a:schemeClr val="lt1"/>
+          </a:fontRef>
+        </p:style>
+        <p:txBody>
+          <a:bodyPr rtlCol="0" anchor="ctr"/>
+          <a:lstStyle/>
+          <a:p>
+            <a:pPr algn="ctr"/>
+          </a:p>
+        </p:txBody>
+      </p:sp>
+      <p:sp>
+        <p:nvSpPr>
+          <p:cNvPr id="19" name="TextBox 18"/>
+          <p:cNvSpPr txBox="1"/>
+          <p:nvPr/>
+        </p:nvSpPr>
+        <p:spPr>
+          <a:xfrm>
+            <a:off x="1554480" y="4873752"/>
+            <a:ext cx="9418320" cy="777240"/>
+          </a:xfrm>
+          <a:prstGeom prst="rect">
+            <a:avLst/>
+          </a:prstGeom>
+          <a:noFill/>
+        </p:spPr>
+        <p:txBody>
+          <a:bodyPr wrap="square" anchor="ctr">
+            <a:spAutoFit/>
+          </a:bodyPr>
+          <a:lstStyle/>
+          <a:p>
+            <a:pPr algn="l">
+              <a:defRPr sz="1800" b="0">
+                <a:solidFill>
+                  <a:srgbClr val="FFFFFF"/>
+                </a:solidFill>
+                <a:latin typeface="Inter"/>
+              </a:defRPr>
+            </a:pPr>
+            <a:r>
+              <a:t>doe-helper automates generation, recording, and analysis</a:t>
+            </a:r>
+          </a:p>
+        </p:txBody>
+      </p:sp>
+      <p:sp>
+        <p:nvSpPr>
+          <p:cNvPr id="20" name="TextBox 19"/>
+          <p:cNvSpPr txBox="1"/>
+          <p:nvPr/>
+        </p:nvSpPr>
+        <p:spPr>
+          <a:xfrm>
+            <a:off x="731520" y="6400800"/>
+            <a:ext cx="10058400" cy="365760"/>
           </a:xfrm>
           <a:prstGeom prst="rect">
             <a:avLst/>
@@ -6278,115 +7663,16 @@
           </a:bodyPr>
           <a:lstStyle/>
           <a:p>
-            <a:pPr>
-              <a:spcAft>
-                <a:spcPts val="800"/>
-              </a:spcAft>
-              <a:defRPr sz="2200" b="0">
-                <a:solidFill>
-                  <a:srgbClr val="222222"/>
-                </a:solidFill>
-                <a:latin typeface="Calibri"/>
-              </a:defRPr>
-            </a:pPr>
-            <a:r>
-              <a:t>Extra runs at the midpoint of all factors</a:t>
-            </a:r>
-          </a:p>
-          <a:p>
-            <a:pPr>
-              <a:spcAft>
-                <a:spcPts val="800"/>
-              </a:spcAft>
-              <a:defRPr sz="2200" b="0">
-                <a:solidFill>
-                  <a:srgbClr val="222222"/>
-                </a:solidFill>
-                <a:latin typeface="Calibri"/>
-              </a:defRPr>
-            </a:pPr>
-            <a:r>
-              <a:t>Purpose: detect curvature (non-linear effects)</a:t>
-            </a:r>
-          </a:p>
-          <a:p>
-            <a:pPr>
-              <a:spcAft>
-                <a:spcPts val="800"/>
-              </a:spcAft>
-              <a:defRPr sz="2200" b="0">
-                <a:solidFill>
-                  <a:srgbClr val="222222"/>
-                </a:solidFill>
-                <a:latin typeface="Calibri"/>
-              </a:defRPr>
-            </a:pPr>
-            <a:r>
-              <a:t>If center-point average differs from predicted linear value:</a:t>
-            </a:r>
-          </a:p>
-          <a:p>
-            <a:pPr lvl="1">
-              <a:spcAft>
-                <a:spcPts val="800"/>
-              </a:spcAft>
-              <a:defRPr sz="1900">
-                <a:solidFill>
-                  <a:srgbClr val="222222"/>
-                </a:solidFill>
-                <a:latin typeface="Calibri"/>
-              </a:defRPr>
-            </a:pPr>
-            <a:r>
-              <a:t>The true relationship is curved</a:t>
-            </a:r>
-          </a:p>
-          <a:p>
-            <a:pPr lvl="1">
-              <a:spcAft>
-                <a:spcPts val="800"/>
-              </a:spcAft>
-              <a:defRPr sz="1900">
-                <a:solidFill>
-                  <a:srgbClr val="222222"/>
-                </a:solidFill>
-                <a:latin typeface="Calibri"/>
-              </a:defRPr>
-            </a:pPr>
-            <a:r>
-              <a:t>You may need a response surface design</a:t>
-            </a:r>
-          </a:p>
-          <a:p>
-            <a:pPr>
-              <a:spcAft>
-                <a:spcPts val="800"/>
-              </a:spcAft>
-              <a:defRPr sz="2200" b="0">
-                <a:solidFill>
-                  <a:srgbClr val="222222"/>
-                </a:solidFill>
-                <a:latin typeface="Calibri"/>
-              </a:defRPr>
-            </a:pPr>
-            <a:r>
-              <a:t>Cheap insurance: 3-5 center points cost little</a:t>
-            </a:r>
-          </a:p>
-          <a:p>
-            <a:pPr>
-              <a:spcAft>
-                <a:spcPts val="800"/>
-              </a:spcAft>
-              <a:defRPr sz="2200" b="0">
-                <a:solidFill>
-                  <a:srgbClr val="222222"/>
-                </a:solidFill>
-                <a:latin typeface="Calibri"/>
-              </a:defRPr>
-            </a:pPr>
-            <a:r>
-              <a:t>doe-helper: set center_points in config.json</a:t>
+            <a:pPr algn="l">
+              <a:defRPr sz="1000" b="0">
+                <a:solidFill>
+                  <a:srgbClr val="6366F1"/>
+                </a:solidFill>
+                <a:latin typeface="Consolas"/>
+              </a:defRPr>
+            </a:pPr>
+            <a:r>
+              <a:t>© 2026 Martin J. Gallagher  |  GPL-3.0-or-later</a:t>
             </a:r>
           </a:p>
         </p:txBody>
